--- a/Slides/Week03/07：NLP任務的內部結構.pptx
+++ b/Slides/Week03/07：NLP任務的內部結構.pptx
@@ -225,7 +225,7 @@
           <a:p>
             <a:fld id="{DF2768FB-F680-46BA-8721-EBD5055783A4}" type="datetimeFigureOut">
               <a:rPr lang="zh-TW" altLang="en-US" smtClean="0"/>
-              <a:t>2024/4/11</a:t>
+              <a:t>2024/12/4</a:t>
             </a:fld>
             <a:endParaRPr lang="zh-TW" altLang="en-US"/>
           </a:p>
@@ -1916,7 +1916,7 @@
           <a:p>
             <a:fld id="{0495B665-C8E0-4414-8FEF-82ED686654F1}" type="datetimeFigureOut">
               <a:rPr lang="zh-TW" altLang="en-US" smtClean="0"/>
-              <a:t>2024/4/11</a:t>
+              <a:t>2024/12/4</a:t>
             </a:fld>
             <a:endParaRPr lang="zh-TW" altLang="en-US"/>
           </a:p>
@@ -2114,7 +2114,7 @@
           <a:p>
             <a:fld id="{0495B665-C8E0-4414-8FEF-82ED686654F1}" type="datetimeFigureOut">
               <a:rPr lang="zh-TW" altLang="en-US" smtClean="0"/>
-              <a:t>2024/4/11</a:t>
+              <a:t>2024/12/4</a:t>
             </a:fld>
             <a:endParaRPr lang="zh-TW" altLang="en-US"/>
           </a:p>
@@ -2322,7 +2322,7 @@
           <a:p>
             <a:fld id="{0495B665-C8E0-4414-8FEF-82ED686654F1}" type="datetimeFigureOut">
               <a:rPr lang="zh-TW" altLang="en-US" smtClean="0"/>
-              <a:t>2024/4/11</a:t>
+              <a:t>2024/12/4</a:t>
             </a:fld>
             <a:endParaRPr lang="zh-TW" altLang="en-US"/>
           </a:p>
@@ -2703,7 +2703,7 @@
                 </a:solidFill>
               </a:rPr>
               <a:pPr/>
-              <a:t>4/11/2024</a:t>
+              <a:t>12/4/2024</a:t>
             </a:fld>
             <a:endParaRPr kumimoji="0" lang="en-US" dirty="0"/>
           </a:p>
@@ -2934,7 +2934,7 @@
                 </a:solidFill>
               </a:rPr>
               <a:pPr/>
-              <a:t>4/11/2024</a:t>
+              <a:t>12/4/2024</a:t>
             </a:fld>
             <a:endParaRPr kumimoji="0" lang="en-US" dirty="0"/>
           </a:p>
@@ -3167,7 +3167,7 @@
                 </a:solidFill>
               </a:rPr>
               <a:pPr/>
-              <a:t>4/11/2024</a:t>
+              <a:t>12/4/2024</a:t>
             </a:fld>
             <a:endParaRPr kumimoji="0" lang="en-US" dirty="0"/>
           </a:p>
@@ -3649,7 +3649,7 @@
                 </a:solidFill>
               </a:rPr>
               <a:pPr/>
-              <a:t>4/11/2024</a:t>
+              <a:t>12/4/2024</a:t>
             </a:fld>
             <a:endParaRPr kumimoji="0" lang="en-US" dirty="0"/>
           </a:p>
@@ -4006,7 +4006,7 @@
                 </a:solidFill>
               </a:rPr>
               <a:pPr/>
-              <a:t>4/11/2024</a:t>
+              <a:t>12/4/2024</a:t>
             </a:fld>
             <a:endParaRPr kumimoji="0" lang="en-US" dirty="0"/>
           </a:p>
@@ -4369,7 +4369,7 @@
                 </a:solidFill>
               </a:rPr>
               <a:pPr/>
-              <a:t>4/11/2024</a:t>
+              <a:t>12/4/2024</a:t>
             </a:fld>
             <a:endParaRPr kumimoji="0" lang="en-US" dirty="0"/>
           </a:p>
@@ -4679,7 +4679,7 @@
                 </a:solidFill>
               </a:rPr>
               <a:pPr/>
-              <a:t>4/11/2024</a:t>
+              <a:t>12/4/2024</a:t>
             </a:fld>
             <a:endParaRPr kumimoji="0" lang="en-US" dirty="0"/>
           </a:p>
@@ -4874,7 +4874,7 @@
           <a:p>
             <a:fld id="{0495B665-C8E0-4414-8FEF-82ED686654F1}" type="datetimeFigureOut">
               <a:rPr lang="zh-TW" altLang="en-US" smtClean="0"/>
-              <a:t>2024/4/11</a:t>
+              <a:t>2024/12/4</a:t>
             </a:fld>
             <a:endParaRPr lang="zh-TW" altLang="en-US"/>
           </a:p>
@@ -5358,7 +5358,7 @@
                 </a:solidFill>
               </a:rPr>
               <a:pPr/>
-              <a:t>4/11/2024</a:t>
+              <a:t>12/4/2024</a:t>
             </a:fld>
             <a:endParaRPr kumimoji="0" lang="en-US" dirty="0"/>
           </a:p>
@@ -5754,7 +5754,7 @@
                 </a:solidFill>
               </a:rPr>
               <a:pPr/>
-              <a:t>4/11/2024</a:t>
+              <a:t>12/4/2024</a:t>
             </a:fld>
             <a:endParaRPr kumimoji="0" lang="en-US" dirty="0"/>
           </a:p>
@@ -6094,7 +6094,7 @@
                 </a:solidFill>
               </a:rPr>
               <a:pPr/>
-              <a:t>4/11/2024</a:t>
+              <a:t>12/4/2024</a:t>
             </a:fld>
             <a:endParaRPr kumimoji="0" lang="en-US" dirty="0"/>
           </a:p>
@@ -6675,7 +6675,7 @@
                 </a:solidFill>
               </a:rPr>
               <a:pPr/>
-              <a:t>4/11/2024</a:t>
+              <a:t>12/4/2024</a:t>
             </a:fld>
             <a:endParaRPr kumimoji="0" lang="en-US" dirty="0"/>
           </a:p>
@@ -7244,7 +7244,7 @@
                 </a:solidFill>
               </a:rPr>
               <a:pPr/>
-              <a:t>4/11/2024</a:t>
+              <a:t>12/4/2024</a:t>
             </a:fld>
             <a:endParaRPr kumimoji="0" lang="en-US" dirty="0"/>
           </a:p>
@@ -7708,7 +7708,7 @@
                 </a:solidFill>
               </a:rPr>
               <a:pPr/>
-              <a:t>4/11/2024</a:t>
+              <a:t>12/4/2024</a:t>
             </a:fld>
             <a:endParaRPr kumimoji="0" lang="en-US" dirty="0"/>
           </a:p>
@@ -8137,7 +8137,7 @@
                 </a:solidFill>
               </a:rPr>
               <a:pPr/>
-              <a:t>4/11/2024</a:t>
+              <a:t>12/4/2024</a:t>
             </a:fld>
             <a:endParaRPr kumimoji="0" lang="en-US" dirty="0"/>
           </a:p>
@@ -8646,7 +8646,7 @@
                 </a:solidFill>
               </a:rPr>
               <a:pPr/>
-              <a:t>4/11/2024</a:t>
+              <a:t>12/4/2024</a:t>
             </a:fld>
             <a:endParaRPr kumimoji="0" lang="en-US" dirty="0"/>
           </a:p>
@@ -9155,7 +9155,7 @@
                 </a:solidFill>
               </a:rPr>
               <a:pPr/>
-              <a:t>4/11/2024</a:t>
+              <a:t>12/4/2024</a:t>
             </a:fld>
             <a:endParaRPr kumimoji="0" lang="en-US" dirty="0"/>
           </a:p>
@@ -9376,7 +9376,7 @@
                 </a:solidFill>
               </a:rPr>
               <a:pPr/>
-              <a:t>4/11/2024</a:t>
+              <a:t>12/4/2024</a:t>
             </a:fld>
             <a:endParaRPr kumimoji="0" lang="en-US" dirty="0"/>
           </a:p>
@@ -9648,7 +9648,7 @@
           <a:p>
             <a:fld id="{0495B665-C8E0-4414-8FEF-82ED686654F1}" type="datetimeFigureOut">
               <a:rPr lang="zh-TW" altLang="en-US" smtClean="0"/>
-              <a:t>2024/4/11</a:t>
+              <a:t>2024/12/4</a:t>
             </a:fld>
             <a:endParaRPr lang="zh-TW" altLang="en-US"/>
           </a:p>
@@ -9984,7 +9984,7 @@
                 </a:solidFill>
               </a:rPr>
               <a:pPr/>
-              <a:t>4/11/2024</a:t>
+              <a:t>12/4/2024</a:t>
             </a:fld>
             <a:endParaRPr kumimoji="0" lang="en-US" dirty="0"/>
           </a:p>
@@ -10208,7 +10208,7 @@
                 </a:solidFill>
               </a:rPr>
               <a:pPr/>
-              <a:t>4/11/2024</a:t>
+              <a:t>12/4/2024</a:t>
             </a:fld>
             <a:endParaRPr kumimoji="0" lang="en-US" dirty="0"/>
           </a:p>
@@ -10389,7 +10389,7 @@
             <a:fld id="{ACB2EC6F-6501-4E04-BD6C-A8A6CABB2C5B}" type="datetimeFigureOut">
               <a:rPr kumimoji="0" lang="en-US" smtClean="0"/>
               <a:pPr/>
-              <a:t>4/11/2024</a:t>
+              <a:t>12/4/2024</a:t>
             </a:fld>
             <a:endParaRPr kumimoji="0" lang="en-US" dirty="0"/>
           </a:p>
@@ -10673,7 +10673,7 @@
           <a:p>
             <a:fld id="{0495B665-C8E0-4414-8FEF-82ED686654F1}" type="datetimeFigureOut">
               <a:rPr lang="zh-TW" altLang="en-US" smtClean="0"/>
-              <a:t>2024/4/11</a:t>
+              <a:t>2024/12/4</a:t>
             </a:fld>
             <a:endParaRPr lang="zh-TW" altLang="en-US"/>
           </a:p>
@@ -11085,7 +11085,7 @@
           <a:p>
             <a:fld id="{0495B665-C8E0-4414-8FEF-82ED686654F1}" type="datetimeFigureOut">
               <a:rPr lang="zh-TW" altLang="en-US" smtClean="0"/>
-              <a:t>2024/4/11</a:t>
+              <a:t>2024/12/4</a:t>
             </a:fld>
             <a:endParaRPr lang="zh-TW" altLang="en-US"/>
           </a:p>
@@ -11226,7 +11226,7 @@
           <a:p>
             <a:fld id="{0495B665-C8E0-4414-8FEF-82ED686654F1}" type="datetimeFigureOut">
               <a:rPr lang="zh-TW" altLang="en-US" smtClean="0"/>
-              <a:t>2024/4/11</a:t>
+              <a:t>2024/12/4</a:t>
             </a:fld>
             <a:endParaRPr lang="zh-TW" altLang="en-US"/>
           </a:p>
@@ -11339,7 +11339,7 @@
           <a:p>
             <a:fld id="{0495B665-C8E0-4414-8FEF-82ED686654F1}" type="datetimeFigureOut">
               <a:rPr lang="zh-TW" altLang="en-US" smtClean="0"/>
-              <a:t>2024/4/11</a:t>
+              <a:t>2024/12/4</a:t>
             </a:fld>
             <a:endParaRPr lang="zh-TW" altLang="en-US"/>
           </a:p>
@@ -11650,7 +11650,7 @@
           <a:p>
             <a:fld id="{0495B665-C8E0-4414-8FEF-82ED686654F1}" type="datetimeFigureOut">
               <a:rPr lang="zh-TW" altLang="en-US" smtClean="0"/>
-              <a:t>2024/4/11</a:t>
+              <a:t>2024/12/4</a:t>
             </a:fld>
             <a:endParaRPr lang="zh-TW" altLang="en-US"/>
           </a:p>
@@ -11938,7 +11938,7 @@
           <a:p>
             <a:fld id="{0495B665-C8E0-4414-8FEF-82ED686654F1}" type="datetimeFigureOut">
               <a:rPr lang="zh-TW" altLang="en-US" smtClean="0"/>
-              <a:t>2024/4/11</a:t>
+              <a:t>2024/12/4</a:t>
             </a:fld>
             <a:endParaRPr lang="zh-TW" altLang="en-US"/>
           </a:p>
@@ -12179,7 +12179,7 @@
           <a:p>
             <a:fld id="{0495B665-C8E0-4414-8FEF-82ED686654F1}" type="datetimeFigureOut">
               <a:rPr lang="zh-TW" altLang="en-US" smtClean="0"/>
-              <a:t>2024/4/11</a:t>
+              <a:t>2024/12/4</a:t>
             </a:fld>
             <a:endParaRPr lang="zh-TW" altLang="en-US"/>
           </a:p>
@@ -12751,7 +12751,7 @@
                 </a:solidFill>
               </a:rPr>
               <a:pPr/>
-              <a:t>4/11/2024</a:t>
+              <a:t>12/4/2024</a:t>
             </a:fld>
             <a:endParaRPr kumimoji="0" lang="en-US" sz="1200" dirty="0">
               <a:solidFill>
@@ -13512,6 +13512,31 @@
               </a:rPr>
               <a:t>映射到一個整數</a:t>
             </a:r>
+            <a:r>
+              <a:rPr lang="en-US" altLang="zh-TW" sz="3200" dirty="0">
+                <a:latin typeface="微軟正黑體" panose="020B0604030504040204" pitchFamily="34" charset="-120"/>
+                <a:ea typeface="微軟正黑體" panose="020B0604030504040204" pitchFamily="34" charset="-120"/>
+              </a:rPr>
+              <a:t>(</a:t>
+            </a:r>
+            <a:r>
+              <a:rPr lang="zh-TW" altLang="en-US" sz="3200" dirty="0">
+                <a:latin typeface="微軟正黑體" panose="020B0604030504040204" pitchFamily="34" charset="-120"/>
+                <a:ea typeface="微軟正黑體" panose="020B0604030504040204" pitchFamily="34" charset="-120"/>
+              </a:rPr>
+              <a:t>編號</a:t>
+            </a:r>
+            <a:r>
+              <a:rPr lang="en-US" altLang="zh-TW" sz="3200" dirty="0">
+                <a:latin typeface="微軟正黑體" panose="020B0604030504040204" pitchFamily="34" charset="-120"/>
+                <a:ea typeface="微軟正黑體" panose="020B0604030504040204" pitchFamily="34" charset="-120"/>
+              </a:rPr>
+              <a:t>)</a:t>
+            </a:r>
+            <a:endParaRPr lang="zh-TW" altLang="en-US" sz="3200" dirty="0">
+              <a:latin typeface="微軟正黑體" panose="020B0604030504040204" pitchFamily="34" charset="-120"/>
+              <a:ea typeface="微軟正黑體" panose="020B0604030504040204" pitchFamily="34" charset="-120"/>
+            </a:endParaRPr>
           </a:p>
           <a:p>
             <a:pPr marL="514350" indent="-514350">
@@ -14603,10 +14628,10 @@
       </p:grpSpPr>
       <p:pic>
         <p:nvPicPr>
-          <p:cNvPr id="5" name="圖片 4">
+          <p:cNvPr id="3" name="圖片 2">
             <a:extLst>
               <a:ext uri="{FF2B5EF4-FFF2-40B4-BE49-F238E27FC236}">
-                <a16:creationId xmlns:a16="http://schemas.microsoft.com/office/drawing/2014/main" id="{FD265730-4971-38B5-520D-3458A0EC48B6}"/>
+                <a16:creationId xmlns:a16="http://schemas.microsoft.com/office/drawing/2014/main" id="{557B723C-8D23-A19D-53F1-CEA5D3BA66F5}"/>
               </a:ext>
             </a:extLst>
           </p:cNvPr>
@@ -14623,8 +14648,8 @@
         </p:blipFill>
         <p:spPr>
           <a:xfrm>
-            <a:off x="85134" y="1655819"/>
-            <a:ext cx="8973732" cy="3546361"/>
+            <a:off x="0" y="1209969"/>
+            <a:ext cx="9144000" cy="4829946"/>
           </a:xfrm>
           <a:prstGeom prst="rect">
             <a:avLst/>

--- a/Slides/Week03/07：NLP任務的內部結構.pptx
+++ b/Slides/Week03/07：NLP任務的內部結構.pptx
@@ -6,7 +6,7 @@
     <p:sldMasterId id="2147483660" r:id="rId2"/>
   </p:sldMasterIdLst>
   <p:notesMasterIdLst>
-    <p:notesMasterId r:id="rId31"/>
+    <p:notesMasterId r:id="rId33"/>
   </p:notesMasterIdLst>
   <p:sldIdLst>
     <p:sldId id="681" r:id="rId3"/>
@@ -18,25 +18,27 @@
     <p:sldId id="1220" r:id="rId9"/>
     <p:sldId id="1239" r:id="rId10"/>
     <p:sldId id="1240" r:id="rId11"/>
-    <p:sldId id="1238" r:id="rId12"/>
-    <p:sldId id="1222" r:id="rId13"/>
-    <p:sldId id="1223" r:id="rId14"/>
-    <p:sldId id="1224" r:id="rId15"/>
-    <p:sldId id="1225" r:id="rId16"/>
-    <p:sldId id="1243" r:id="rId17"/>
-    <p:sldId id="1244" r:id="rId18"/>
-    <p:sldId id="1226" r:id="rId19"/>
-    <p:sldId id="1227" r:id="rId20"/>
-    <p:sldId id="1228" r:id="rId21"/>
-    <p:sldId id="1229" r:id="rId22"/>
-    <p:sldId id="1230" r:id="rId23"/>
-    <p:sldId id="1231" r:id="rId24"/>
-    <p:sldId id="1232" r:id="rId25"/>
-    <p:sldId id="1233" r:id="rId26"/>
-    <p:sldId id="1234" r:id="rId27"/>
-    <p:sldId id="1235" r:id="rId28"/>
-    <p:sldId id="1236" r:id="rId29"/>
-    <p:sldId id="1237" r:id="rId30"/>
+    <p:sldId id="1245" r:id="rId12"/>
+    <p:sldId id="1246" r:id="rId13"/>
+    <p:sldId id="1238" r:id="rId14"/>
+    <p:sldId id="1222" r:id="rId15"/>
+    <p:sldId id="1223" r:id="rId16"/>
+    <p:sldId id="1224" r:id="rId17"/>
+    <p:sldId id="1225" r:id="rId18"/>
+    <p:sldId id="1243" r:id="rId19"/>
+    <p:sldId id="1244" r:id="rId20"/>
+    <p:sldId id="1226" r:id="rId21"/>
+    <p:sldId id="1227" r:id="rId22"/>
+    <p:sldId id="1228" r:id="rId23"/>
+    <p:sldId id="1229" r:id="rId24"/>
+    <p:sldId id="1230" r:id="rId25"/>
+    <p:sldId id="1231" r:id="rId26"/>
+    <p:sldId id="1232" r:id="rId27"/>
+    <p:sldId id="1233" r:id="rId28"/>
+    <p:sldId id="1234" r:id="rId29"/>
+    <p:sldId id="1235" r:id="rId30"/>
+    <p:sldId id="1236" r:id="rId31"/>
+    <p:sldId id="1237" r:id="rId32"/>
   </p:sldIdLst>
   <p:sldSz cx="9144000" cy="6858000" type="screen4x3"/>
   <p:notesSz cx="6858000" cy="9144000"/>
@@ -225,7 +227,7 @@
           <a:p>
             <a:fld id="{DF2768FB-F680-46BA-8721-EBD5055783A4}" type="datetimeFigureOut">
               <a:rPr lang="zh-TW" altLang="en-US" smtClean="0"/>
-              <a:t>2024/12/4</a:t>
+              <a:t>2024/12/11</a:t>
             </a:fld>
             <a:endParaRPr lang="zh-TW" altLang="en-US"/>
           </a:p>
@@ -654,7 +656,7 @@
     </p:spTree>
     <p:extLst>
       <p:ext uri="{BB962C8B-B14F-4D97-AF65-F5344CB8AC3E}">
-        <p14:creationId xmlns:p14="http://schemas.microsoft.com/office/powerpoint/2010/main" val="3246709978"/>
+        <p14:creationId xmlns:p14="http://schemas.microsoft.com/office/powerpoint/2010/main" val="815068760"/>
       </p:ext>
     </p:extLst>
   </p:cSld>
@@ -739,7 +741,7 @@
     </p:spTree>
     <p:extLst>
       <p:ext uri="{BB962C8B-B14F-4D97-AF65-F5344CB8AC3E}">
-        <p14:creationId xmlns:p14="http://schemas.microsoft.com/office/powerpoint/2010/main" val="3110149131"/>
+        <p14:creationId xmlns:p14="http://schemas.microsoft.com/office/powerpoint/2010/main" val="3246709978"/>
       </p:ext>
     </p:extLst>
   </p:cSld>
@@ -815,7 +817,7 @@
             <a:fld id="{9B26CD33-4337-4529-948A-94F6960B2374}" type="slidenum">
               <a:rPr lang="en-US" smtClean="0"/>
               <a:pPr/>
-              <a:t>18</a:t>
+              <a:t>19</a:t>
             </a:fld>
             <a:endParaRPr lang="en-US" dirty="0"/>
           </a:p>
@@ -824,7 +826,7 @@
     </p:spTree>
     <p:extLst>
       <p:ext uri="{BB962C8B-B14F-4D97-AF65-F5344CB8AC3E}">
-        <p14:creationId xmlns:p14="http://schemas.microsoft.com/office/powerpoint/2010/main" val="437194601"/>
+        <p14:creationId xmlns:p14="http://schemas.microsoft.com/office/powerpoint/2010/main" val="3110149131"/>
       </p:ext>
     </p:extLst>
   </p:cSld>
@@ -900,7 +902,7 @@
             <a:fld id="{9B26CD33-4337-4529-948A-94F6960B2374}" type="slidenum">
               <a:rPr lang="en-US" smtClean="0"/>
               <a:pPr/>
-              <a:t>19</a:t>
+              <a:t>20</a:t>
             </a:fld>
             <a:endParaRPr lang="en-US" dirty="0"/>
           </a:p>
@@ -909,7 +911,7 @@
     </p:spTree>
     <p:extLst>
       <p:ext uri="{BB962C8B-B14F-4D97-AF65-F5344CB8AC3E}">
-        <p14:creationId xmlns:p14="http://schemas.microsoft.com/office/powerpoint/2010/main" val="1134284852"/>
+        <p14:creationId xmlns:p14="http://schemas.microsoft.com/office/powerpoint/2010/main" val="437194601"/>
       </p:ext>
     </p:extLst>
   </p:cSld>
@@ -985,7 +987,7 @@
             <a:fld id="{9B26CD33-4337-4529-948A-94F6960B2374}" type="slidenum">
               <a:rPr lang="en-US" smtClean="0"/>
               <a:pPr/>
-              <a:t>20</a:t>
+              <a:t>21</a:t>
             </a:fld>
             <a:endParaRPr lang="en-US" dirty="0"/>
           </a:p>
@@ -994,7 +996,7 @@
     </p:spTree>
     <p:extLst>
       <p:ext uri="{BB962C8B-B14F-4D97-AF65-F5344CB8AC3E}">
-        <p14:creationId xmlns:p14="http://schemas.microsoft.com/office/powerpoint/2010/main" val="473158913"/>
+        <p14:creationId xmlns:p14="http://schemas.microsoft.com/office/powerpoint/2010/main" val="1134284852"/>
       </p:ext>
     </p:extLst>
   </p:cSld>
@@ -1070,7 +1072,92 @@
             <a:fld id="{9B26CD33-4337-4529-948A-94F6960B2374}" type="slidenum">
               <a:rPr lang="en-US" smtClean="0"/>
               <a:pPr/>
-              <a:t>21</a:t>
+              <a:t>22</a:t>
+            </a:fld>
+            <a:endParaRPr lang="en-US" dirty="0"/>
+          </a:p>
+        </p:txBody>
+      </p:sp>
+    </p:spTree>
+    <p:extLst>
+      <p:ext uri="{BB962C8B-B14F-4D97-AF65-F5344CB8AC3E}">
+        <p14:creationId xmlns:p14="http://schemas.microsoft.com/office/powerpoint/2010/main" val="473158913"/>
+      </p:ext>
+    </p:extLst>
+  </p:cSld>
+  <p:clrMapOvr>
+    <a:masterClrMapping/>
+  </p:clrMapOvr>
+</p:notes>
+</file>
+
+<file path=ppt/notesSlides/notesSlide16.xml><?xml version="1.0" encoding="utf-8"?>
+<p:notes xmlns:a="http://schemas.openxmlformats.org/drawingml/2006/main" xmlns:r="http://schemas.openxmlformats.org/officeDocument/2006/relationships" xmlns:p="http://schemas.openxmlformats.org/presentationml/2006/main">
+  <p:cSld>
+    <p:spTree>
+      <p:nvGrpSpPr>
+        <p:cNvPr id="1" name=""/>
+        <p:cNvGrpSpPr/>
+        <p:nvPr/>
+      </p:nvGrpSpPr>
+      <p:grpSpPr>
+        <a:xfrm>
+          <a:off x="0" y="0"/>
+          <a:ext cx="0" cy="0"/>
+          <a:chOff x="0" y="0"/>
+          <a:chExt cx="0" cy="0"/>
+        </a:xfrm>
+      </p:grpSpPr>
+      <p:sp>
+        <p:nvSpPr>
+          <p:cNvPr id="2" name="投影片圖像版面配置區 1"/>
+          <p:cNvSpPr>
+            <a:spLocks noGrp="1" noRot="1" noChangeAspect="1"/>
+          </p:cNvSpPr>
+          <p:nvPr>
+            <p:ph type="sldImg"/>
+          </p:nvPr>
+        </p:nvSpPr>
+        <p:spPr/>
+      </p:sp>
+      <p:sp>
+        <p:nvSpPr>
+          <p:cNvPr id="3" name="備忘稿版面配置區 2"/>
+          <p:cNvSpPr>
+            <a:spLocks noGrp="1"/>
+          </p:cNvSpPr>
+          <p:nvPr>
+            <p:ph type="body" idx="1"/>
+          </p:nvPr>
+        </p:nvSpPr>
+        <p:spPr/>
+        <p:txBody>
+          <a:bodyPr/>
+          <a:lstStyle/>
+          <a:p>
+            <a:endParaRPr lang="zh-TW" altLang="en-US" dirty="0"/>
+          </a:p>
+        </p:txBody>
+      </p:sp>
+      <p:sp>
+        <p:nvSpPr>
+          <p:cNvPr id="4" name="投影片編號版面配置區 3"/>
+          <p:cNvSpPr>
+            <a:spLocks noGrp="1"/>
+          </p:cNvSpPr>
+          <p:nvPr>
+            <p:ph type="sldNum" sz="quarter" idx="10"/>
+          </p:nvPr>
+        </p:nvSpPr>
+        <p:spPr/>
+        <p:txBody>
+          <a:bodyPr/>
+          <a:lstStyle/>
+          <a:p>
+            <a:fld id="{9B26CD33-4337-4529-948A-94F6960B2374}" type="slidenum">
+              <a:rPr lang="en-US" smtClean="0"/>
+              <a:pPr/>
+              <a:t>23</a:t>
             </a:fld>
             <a:endParaRPr lang="en-US" dirty="0"/>
           </a:p>
@@ -1519,7 +1606,13 @@
   <p:cSld>
     <p:spTree>
       <p:nvGrpSpPr>
-        <p:cNvPr id="1" name=""/>
+        <p:cNvPr id="1" name="">
+          <a:extLst>
+            <a:ext uri="{FF2B5EF4-FFF2-40B4-BE49-F238E27FC236}">
+              <a16:creationId xmlns:a16="http://schemas.microsoft.com/office/drawing/2014/main" id="{6D38261C-4003-F3D7-CB6D-41971CCAC1C9}"/>
+            </a:ext>
+          </a:extLst>
+        </p:cNvPr>
         <p:cNvGrpSpPr/>
         <p:nvPr/>
       </p:nvGrpSpPr>
@@ -1533,7 +1626,13 @@
       </p:grpSpPr>
       <p:sp>
         <p:nvSpPr>
-          <p:cNvPr id="2" name="投影片圖像版面配置區 1"/>
+          <p:cNvPr id="2" name="投影片圖像版面配置區 1">
+            <a:extLst>
+              <a:ext uri="{FF2B5EF4-FFF2-40B4-BE49-F238E27FC236}">
+                <a16:creationId xmlns:a16="http://schemas.microsoft.com/office/drawing/2014/main" id="{65C827C5-1288-F2DC-5685-6D403B9BC053}"/>
+              </a:ext>
+            </a:extLst>
+          </p:cNvPr>
           <p:cNvSpPr>
             <a:spLocks noGrp="1" noRot="1" noChangeAspect="1"/>
           </p:cNvSpPr>
@@ -1545,7 +1644,13 @@
       </p:sp>
       <p:sp>
         <p:nvSpPr>
-          <p:cNvPr id="3" name="備忘稿版面配置區 2"/>
+          <p:cNvPr id="3" name="備忘稿版面配置區 2">
+            <a:extLst>
+              <a:ext uri="{FF2B5EF4-FFF2-40B4-BE49-F238E27FC236}">
+                <a16:creationId xmlns:a16="http://schemas.microsoft.com/office/drawing/2014/main" id="{279C5E01-9031-7D0F-7907-2ED8FA8EFCC8}"/>
+              </a:ext>
+            </a:extLst>
+          </p:cNvPr>
           <p:cNvSpPr>
             <a:spLocks noGrp="1"/>
           </p:cNvSpPr>
@@ -1564,7 +1669,13 @@
       </p:sp>
       <p:sp>
         <p:nvSpPr>
-          <p:cNvPr id="4" name="投影片編號版面配置區 3"/>
+          <p:cNvPr id="4" name="投影片編號版面配置區 3">
+            <a:extLst>
+              <a:ext uri="{FF2B5EF4-FFF2-40B4-BE49-F238E27FC236}">
+                <a16:creationId xmlns:a16="http://schemas.microsoft.com/office/drawing/2014/main" id="{64C22384-7986-CD83-02DE-AE66C19479A1}"/>
+              </a:ext>
+            </a:extLst>
+          </p:cNvPr>
           <p:cNvSpPr>
             <a:spLocks noGrp="1"/>
           </p:cNvSpPr>
@@ -1589,7 +1700,7 @@
     </p:spTree>
     <p:extLst>
       <p:ext uri="{BB962C8B-B14F-4D97-AF65-F5344CB8AC3E}">
-        <p14:creationId xmlns:p14="http://schemas.microsoft.com/office/powerpoint/2010/main" val="2233860920"/>
+        <p14:creationId xmlns:p14="http://schemas.microsoft.com/office/powerpoint/2010/main" val="2460136905"/>
       </p:ext>
     </p:extLst>
   </p:cSld>
@@ -1665,7 +1776,7 @@
             <a:fld id="{9B26CD33-4337-4529-948A-94F6960B2374}" type="slidenum">
               <a:rPr lang="en-US" smtClean="0"/>
               <a:pPr/>
-              <a:t>11</a:t>
+              <a:t>12</a:t>
             </a:fld>
             <a:endParaRPr lang="en-US" dirty="0"/>
           </a:p>
@@ -1674,7 +1785,7 @@
     </p:spTree>
     <p:extLst>
       <p:ext uri="{BB962C8B-B14F-4D97-AF65-F5344CB8AC3E}">
-        <p14:creationId xmlns:p14="http://schemas.microsoft.com/office/powerpoint/2010/main" val="3621464486"/>
+        <p14:creationId xmlns:p14="http://schemas.microsoft.com/office/powerpoint/2010/main" val="2233860920"/>
       </p:ext>
     </p:extLst>
   </p:cSld>
@@ -1759,7 +1870,7 @@
     </p:spTree>
     <p:extLst>
       <p:ext uri="{BB962C8B-B14F-4D97-AF65-F5344CB8AC3E}">
-        <p14:creationId xmlns:p14="http://schemas.microsoft.com/office/powerpoint/2010/main" val="815068760"/>
+        <p14:creationId xmlns:p14="http://schemas.microsoft.com/office/powerpoint/2010/main" val="3621464486"/>
       </p:ext>
     </p:extLst>
   </p:cSld>
@@ -1916,7 +2027,7 @@
           <a:p>
             <a:fld id="{0495B665-C8E0-4414-8FEF-82ED686654F1}" type="datetimeFigureOut">
               <a:rPr lang="zh-TW" altLang="en-US" smtClean="0"/>
-              <a:t>2024/12/4</a:t>
+              <a:t>2024/12/11</a:t>
             </a:fld>
             <a:endParaRPr lang="zh-TW" altLang="en-US"/>
           </a:p>
@@ -2114,7 +2225,7 @@
           <a:p>
             <a:fld id="{0495B665-C8E0-4414-8FEF-82ED686654F1}" type="datetimeFigureOut">
               <a:rPr lang="zh-TW" altLang="en-US" smtClean="0"/>
-              <a:t>2024/12/4</a:t>
+              <a:t>2024/12/11</a:t>
             </a:fld>
             <a:endParaRPr lang="zh-TW" altLang="en-US"/>
           </a:p>
@@ -2322,7 +2433,7 @@
           <a:p>
             <a:fld id="{0495B665-C8E0-4414-8FEF-82ED686654F1}" type="datetimeFigureOut">
               <a:rPr lang="zh-TW" altLang="en-US" smtClean="0"/>
-              <a:t>2024/12/4</a:t>
+              <a:t>2024/12/11</a:t>
             </a:fld>
             <a:endParaRPr lang="zh-TW" altLang="en-US"/>
           </a:p>
@@ -2703,7 +2814,7 @@
                 </a:solidFill>
               </a:rPr>
               <a:pPr/>
-              <a:t>12/4/2024</a:t>
+              <a:t>12/11/2024</a:t>
             </a:fld>
             <a:endParaRPr kumimoji="0" lang="en-US" dirty="0"/>
           </a:p>
@@ -2934,7 +3045,7 @@
                 </a:solidFill>
               </a:rPr>
               <a:pPr/>
-              <a:t>12/4/2024</a:t>
+              <a:t>12/11/2024</a:t>
             </a:fld>
             <a:endParaRPr kumimoji="0" lang="en-US" dirty="0"/>
           </a:p>
@@ -3167,7 +3278,7 @@
                 </a:solidFill>
               </a:rPr>
               <a:pPr/>
-              <a:t>12/4/2024</a:t>
+              <a:t>12/11/2024</a:t>
             </a:fld>
             <a:endParaRPr kumimoji="0" lang="en-US" dirty="0"/>
           </a:p>
@@ -3649,7 +3760,7 @@
                 </a:solidFill>
               </a:rPr>
               <a:pPr/>
-              <a:t>12/4/2024</a:t>
+              <a:t>12/11/2024</a:t>
             </a:fld>
             <a:endParaRPr kumimoji="0" lang="en-US" dirty="0"/>
           </a:p>
@@ -4006,7 +4117,7 @@
                 </a:solidFill>
               </a:rPr>
               <a:pPr/>
-              <a:t>12/4/2024</a:t>
+              <a:t>12/11/2024</a:t>
             </a:fld>
             <a:endParaRPr kumimoji="0" lang="en-US" dirty="0"/>
           </a:p>
@@ -4369,7 +4480,7 @@
                 </a:solidFill>
               </a:rPr>
               <a:pPr/>
-              <a:t>12/4/2024</a:t>
+              <a:t>12/11/2024</a:t>
             </a:fld>
             <a:endParaRPr kumimoji="0" lang="en-US" dirty="0"/>
           </a:p>
@@ -4679,7 +4790,7 @@
                 </a:solidFill>
               </a:rPr>
               <a:pPr/>
-              <a:t>12/4/2024</a:t>
+              <a:t>12/11/2024</a:t>
             </a:fld>
             <a:endParaRPr kumimoji="0" lang="en-US" dirty="0"/>
           </a:p>
@@ -4874,7 +4985,7 @@
           <a:p>
             <a:fld id="{0495B665-C8E0-4414-8FEF-82ED686654F1}" type="datetimeFigureOut">
               <a:rPr lang="zh-TW" altLang="en-US" smtClean="0"/>
-              <a:t>2024/12/4</a:t>
+              <a:t>2024/12/11</a:t>
             </a:fld>
             <a:endParaRPr lang="zh-TW" altLang="en-US"/>
           </a:p>
@@ -5358,7 +5469,7 @@
                 </a:solidFill>
               </a:rPr>
               <a:pPr/>
-              <a:t>12/4/2024</a:t>
+              <a:t>12/11/2024</a:t>
             </a:fld>
             <a:endParaRPr kumimoji="0" lang="en-US" dirty="0"/>
           </a:p>
@@ -5754,7 +5865,7 @@
                 </a:solidFill>
               </a:rPr>
               <a:pPr/>
-              <a:t>12/4/2024</a:t>
+              <a:t>12/11/2024</a:t>
             </a:fld>
             <a:endParaRPr kumimoji="0" lang="en-US" dirty="0"/>
           </a:p>
@@ -6094,7 +6205,7 @@
                 </a:solidFill>
               </a:rPr>
               <a:pPr/>
-              <a:t>12/4/2024</a:t>
+              <a:t>12/11/2024</a:t>
             </a:fld>
             <a:endParaRPr kumimoji="0" lang="en-US" dirty="0"/>
           </a:p>
@@ -6675,7 +6786,7 @@
                 </a:solidFill>
               </a:rPr>
               <a:pPr/>
-              <a:t>12/4/2024</a:t>
+              <a:t>12/11/2024</a:t>
             </a:fld>
             <a:endParaRPr kumimoji="0" lang="en-US" dirty="0"/>
           </a:p>
@@ -7244,7 +7355,7 @@
                 </a:solidFill>
               </a:rPr>
               <a:pPr/>
-              <a:t>12/4/2024</a:t>
+              <a:t>12/11/2024</a:t>
             </a:fld>
             <a:endParaRPr kumimoji="0" lang="en-US" dirty="0"/>
           </a:p>
@@ -7708,7 +7819,7 @@
                 </a:solidFill>
               </a:rPr>
               <a:pPr/>
-              <a:t>12/4/2024</a:t>
+              <a:t>12/11/2024</a:t>
             </a:fld>
             <a:endParaRPr kumimoji="0" lang="en-US" dirty="0"/>
           </a:p>
@@ -8137,7 +8248,7 @@
                 </a:solidFill>
               </a:rPr>
               <a:pPr/>
-              <a:t>12/4/2024</a:t>
+              <a:t>12/11/2024</a:t>
             </a:fld>
             <a:endParaRPr kumimoji="0" lang="en-US" dirty="0"/>
           </a:p>
@@ -8646,7 +8757,7 @@
                 </a:solidFill>
               </a:rPr>
               <a:pPr/>
-              <a:t>12/4/2024</a:t>
+              <a:t>12/11/2024</a:t>
             </a:fld>
             <a:endParaRPr kumimoji="0" lang="en-US" dirty="0"/>
           </a:p>
@@ -9155,7 +9266,7 @@
                 </a:solidFill>
               </a:rPr>
               <a:pPr/>
-              <a:t>12/4/2024</a:t>
+              <a:t>12/11/2024</a:t>
             </a:fld>
             <a:endParaRPr kumimoji="0" lang="en-US" dirty="0"/>
           </a:p>
@@ -9376,7 +9487,7 @@
                 </a:solidFill>
               </a:rPr>
               <a:pPr/>
-              <a:t>12/4/2024</a:t>
+              <a:t>12/11/2024</a:t>
             </a:fld>
             <a:endParaRPr kumimoji="0" lang="en-US" dirty="0"/>
           </a:p>
@@ -9648,7 +9759,7 @@
           <a:p>
             <a:fld id="{0495B665-C8E0-4414-8FEF-82ED686654F1}" type="datetimeFigureOut">
               <a:rPr lang="zh-TW" altLang="en-US" smtClean="0"/>
-              <a:t>2024/12/4</a:t>
+              <a:t>2024/12/11</a:t>
             </a:fld>
             <a:endParaRPr lang="zh-TW" altLang="en-US"/>
           </a:p>
@@ -9984,7 +10095,7 @@
                 </a:solidFill>
               </a:rPr>
               <a:pPr/>
-              <a:t>12/4/2024</a:t>
+              <a:t>12/11/2024</a:t>
             </a:fld>
             <a:endParaRPr kumimoji="0" lang="en-US" dirty="0"/>
           </a:p>
@@ -10208,7 +10319,7 @@
                 </a:solidFill>
               </a:rPr>
               <a:pPr/>
-              <a:t>12/4/2024</a:t>
+              <a:t>12/11/2024</a:t>
             </a:fld>
             <a:endParaRPr kumimoji="0" lang="en-US" dirty="0"/>
           </a:p>
@@ -10389,7 +10500,7 @@
             <a:fld id="{ACB2EC6F-6501-4E04-BD6C-A8A6CABB2C5B}" type="datetimeFigureOut">
               <a:rPr kumimoji="0" lang="en-US" smtClean="0"/>
               <a:pPr/>
-              <a:t>12/4/2024</a:t>
+              <a:t>12/11/2024</a:t>
             </a:fld>
             <a:endParaRPr kumimoji="0" lang="en-US" dirty="0"/>
           </a:p>
@@ -10673,7 +10784,7 @@
           <a:p>
             <a:fld id="{0495B665-C8E0-4414-8FEF-82ED686654F1}" type="datetimeFigureOut">
               <a:rPr lang="zh-TW" altLang="en-US" smtClean="0"/>
-              <a:t>2024/12/4</a:t>
+              <a:t>2024/12/11</a:t>
             </a:fld>
             <a:endParaRPr lang="zh-TW" altLang="en-US"/>
           </a:p>
@@ -11085,7 +11196,7 @@
           <a:p>
             <a:fld id="{0495B665-C8E0-4414-8FEF-82ED686654F1}" type="datetimeFigureOut">
               <a:rPr lang="zh-TW" altLang="en-US" smtClean="0"/>
-              <a:t>2024/12/4</a:t>
+              <a:t>2024/12/11</a:t>
             </a:fld>
             <a:endParaRPr lang="zh-TW" altLang="en-US"/>
           </a:p>
@@ -11226,7 +11337,7 @@
           <a:p>
             <a:fld id="{0495B665-C8E0-4414-8FEF-82ED686654F1}" type="datetimeFigureOut">
               <a:rPr lang="zh-TW" altLang="en-US" smtClean="0"/>
-              <a:t>2024/12/4</a:t>
+              <a:t>2024/12/11</a:t>
             </a:fld>
             <a:endParaRPr lang="zh-TW" altLang="en-US"/>
           </a:p>
@@ -11339,7 +11450,7 @@
           <a:p>
             <a:fld id="{0495B665-C8E0-4414-8FEF-82ED686654F1}" type="datetimeFigureOut">
               <a:rPr lang="zh-TW" altLang="en-US" smtClean="0"/>
-              <a:t>2024/12/4</a:t>
+              <a:t>2024/12/11</a:t>
             </a:fld>
             <a:endParaRPr lang="zh-TW" altLang="en-US"/>
           </a:p>
@@ -11650,7 +11761,7 @@
           <a:p>
             <a:fld id="{0495B665-C8E0-4414-8FEF-82ED686654F1}" type="datetimeFigureOut">
               <a:rPr lang="zh-TW" altLang="en-US" smtClean="0"/>
-              <a:t>2024/12/4</a:t>
+              <a:t>2024/12/11</a:t>
             </a:fld>
             <a:endParaRPr lang="zh-TW" altLang="en-US"/>
           </a:p>
@@ -11938,7 +12049,7 @@
           <a:p>
             <a:fld id="{0495B665-C8E0-4414-8FEF-82ED686654F1}" type="datetimeFigureOut">
               <a:rPr lang="zh-TW" altLang="en-US" smtClean="0"/>
-              <a:t>2024/12/4</a:t>
+              <a:t>2024/12/11</a:t>
             </a:fld>
             <a:endParaRPr lang="zh-TW" altLang="en-US"/>
           </a:p>
@@ -12179,7 +12290,7 @@
           <a:p>
             <a:fld id="{0495B665-C8E0-4414-8FEF-82ED686654F1}" type="datetimeFigureOut">
               <a:rPr lang="zh-TW" altLang="en-US" smtClean="0"/>
-              <a:t>2024/12/4</a:t>
+              <a:t>2024/12/11</a:t>
             </a:fld>
             <a:endParaRPr lang="zh-TW" altLang="en-US"/>
           </a:p>
@@ -12751,7 +12862,7 @@
                 </a:solidFill>
               </a:rPr>
               <a:pPr/>
-              <a:t>12/4/2024</a:t>
+              <a:t>12/11/2024</a:t>
             </a:fld>
             <a:endParaRPr kumimoji="0" lang="en-US" sz="1200" dirty="0">
               <a:solidFill>
@@ -13406,7 +13517,13 @@
   <p:cSld>
     <p:spTree>
       <p:nvGrpSpPr>
-        <p:cNvPr id="1" name=""/>
+        <p:cNvPr id="1" name="">
+          <a:extLst>
+            <a:ext uri="{FF2B5EF4-FFF2-40B4-BE49-F238E27FC236}">
+              <a16:creationId xmlns:a16="http://schemas.microsoft.com/office/drawing/2014/main" id="{6F7E33D1-7979-9EA5-D676-169A5D8C9498}"/>
+            </a:ext>
+          </a:extLst>
+        </p:cNvPr>
         <p:cNvGrpSpPr/>
         <p:nvPr/>
       </p:nvGrpSpPr>
@@ -13420,14 +13537,20 @@
       </p:grpSpPr>
       <p:sp>
         <p:nvSpPr>
-          <p:cNvPr id="5" name="文字方塊 4"/>
+          <p:cNvPr id="5" name="文字方塊 4">
+            <a:extLst>
+              <a:ext uri="{FF2B5EF4-FFF2-40B4-BE49-F238E27FC236}">
+                <a16:creationId xmlns:a16="http://schemas.microsoft.com/office/drawing/2014/main" id="{7FE64851-9BDB-ED9F-0B01-EA91AA186981}"/>
+              </a:ext>
+            </a:extLst>
+          </p:cNvPr>
           <p:cNvSpPr txBox="1"/>
           <p:nvPr/>
         </p:nvSpPr>
         <p:spPr>
           <a:xfrm>
             <a:off x="685800" y="1828800"/>
-            <a:ext cx="8077200" cy="4524315"/>
+            <a:ext cx="8077200" cy="3539430"/>
           </a:xfrm>
           <a:prstGeom prst="rect">
             <a:avLst/>
@@ -13445,25 +13568,18 @@
               <a:buChar char="•"/>
             </a:pPr>
             <a:r>
+              <a:rPr lang="zh-TW" altLang="en-US" sz="3200" dirty="0">
+                <a:latin typeface="微軟正黑體" panose="020B0604030504040204" pitchFamily="34" charset="-120"/>
+                <a:ea typeface="微軟正黑體" panose="020B0604030504040204" pitchFamily="34" charset="-120"/>
+              </a:rPr>
+              <a:t>分詞器將一個單字拆成</a:t>
+            </a:r>
+            <a:r>
               <a:rPr lang="en-US" altLang="zh-TW" sz="3200" dirty="0">
                 <a:latin typeface="微軟正黑體" panose="020B0604030504040204" pitchFamily="34" charset="-120"/>
                 <a:ea typeface="微軟正黑體" panose="020B0604030504040204" pitchFamily="34" charset="-120"/>
               </a:rPr>
-              <a:t>Transformer </a:t>
-            </a:r>
-            <a:r>
-              <a:rPr lang="zh-TW" altLang="en-US" sz="3200" dirty="0">
-                <a:latin typeface="微軟正黑體" panose="020B0604030504040204" pitchFamily="34" charset="-120"/>
-                <a:ea typeface="微軟正黑體" panose="020B0604030504040204" pitchFamily="34" charset="-120"/>
-              </a:rPr>
-              <a:t>模型無法處理文字，第一步是將文字輸入轉換為模型理解的數字，使用</a:t>
-            </a:r>
-            <a:r>
-              <a:rPr lang="en-US" altLang="zh-TW" sz="3200" dirty="0">
-                <a:latin typeface="微軟正黑體" panose="020B0604030504040204" pitchFamily="34" charset="-120"/>
-                <a:ea typeface="微軟正黑體" panose="020B0604030504040204" pitchFamily="34" charset="-120"/>
-              </a:rPr>
-              <a:t>tokenizer</a:t>
+              <a:t>tokens</a:t>
             </a:r>
           </a:p>
           <a:p>
@@ -13476,15 +13592,12 @@
                 <a:latin typeface="微軟正黑體" panose="020B0604030504040204" pitchFamily="34" charset="-120"/>
                 <a:ea typeface="微軟正黑體" panose="020B0604030504040204" pitchFamily="34" charset="-120"/>
               </a:rPr>
-              <a:t>將輸入拆分為單詞、子單詞或符號（如標點符號），稱為標記</a:t>
-            </a:r>
-            <a:r>
-              <a:rPr lang="en-US" altLang="zh-TW" sz="3200" dirty="0">
-                <a:latin typeface="微軟正黑體" panose="020B0604030504040204" pitchFamily="34" charset="-120"/>
-                <a:ea typeface="微軟正黑體" panose="020B0604030504040204" pitchFamily="34" charset="-120"/>
-              </a:rPr>
-              <a:t>(token)</a:t>
-            </a:r>
+              <a:t>拆分的方式不是人定的，是訓練出來的</a:t>
+            </a:r>
+            <a:endParaRPr lang="en-US" altLang="zh-TW" sz="3200" dirty="0">
+              <a:latin typeface="微軟正黑體" panose="020B0604030504040204" pitchFamily="34" charset="-120"/>
+              <a:ea typeface="微軟正黑體" panose="020B0604030504040204" pitchFamily="34" charset="-120"/>
+            </a:endParaRPr>
           </a:p>
           <a:p>
             <a:pPr marL="514350" indent="-514350">
@@ -13496,44 +13609,9 @@
                 <a:latin typeface="微軟正黑體" panose="020B0604030504040204" pitchFamily="34" charset="-120"/>
                 <a:ea typeface="微軟正黑體" panose="020B0604030504040204" pitchFamily="34" charset="-120"/>
               </a:rPr>
-              <a:t>將每個標記</a:t>
-            </a:r>
-            <a:r>
-              <a:rPr lang="en-US" altLang="zh-TW" sz="3200" dirty="0">
-                <a:latin typeface="微軟正黑體" panose="020B0604030504040204" pitchFamily="34" charset="-120"/>
-                <a:ea typeface="微軟正黑體" panose="020B0604030504040204" pitchFamily="34" charset="-120"/>
-              </a:rPr>
-              <a:t>(token)</a:t>
-            </a:r>
-            <a:r>
-              <a:rPr lang="zh-TW" altLang="en-US" sz="3200" dirty="0">
-                <a:latin typeface="微軟正黑體" panose="020B0604030504040204" pitchFamily="34" charset="-120"/>
-                <a:ea typeface="微軟正黑體" panose="020B0604030504040204" pitchFamily="34" charset="-120"/>
-              </a:rPr>
-              <a:t>映射到一個整數</a:t>
-            </a:r>
-            <a:r>
-              <a:rPr lang="en-US" altLang="zh-TW" sz="3200" dirty="0">
-                <a:latin typeface="微軟正黑體" panose="020B0604030504040204" pitchFamily="34" charset="-120"/>
-                <a:ea typeface="微軟正黑體" panose="020B0604030504040204" pitchFamily="34" charset="-120"/>
-              </a:rPr>
-              <a:t>(</a:t>
-            </a:r>
-            <a:r>
-              <a:rPr lang="zh-TW" altLang="en-US" sz="3200" dirty="0">
-                <a:latin typeface="微軟正黑體" panose="020B0604030504040204" pitchFamily="34" charset="-120"/>
-                <a:ea typeface="微軟正黑體" panose="020B0604030504040204" pitchFamily="34" charset="-120"/>
-              </a:rPr>
-              <a:t>編號</a:t>
-            </a:r>
-            <a:r>
-              <a:rPr lang="en-US" altLang="zh-TW" sz="3200" dirty="0">
-                <a:latin typeface="微軟正黑體" panose="020B0604030504040204" pitchFamily="34" charset="-120"/>
-                <a:ea typeface="微軟正黑體" panose="020B0604030504040204" pitchFamily="34" charset="-120"/>
-              </a:rPr>
-              <a:t>)</a:t>
-            </a:r>
-            <a:endParaRPr lang="zh-TW" altLang="en-US" sz="3200" dirty="0">
+              <a:t>使用訓練模型參數的資料集同時拿來訓練分詞器</a:t>
+            </a:r>
+            <a:endParaRPr lang="en-US" altLang="zh-TW" sz="3200" dirty="0">
               <a:latin typeface="微軟正黑體" panose="020B0604030504040204" pitchFamily="34" charset="-120"/>
               <a:ea typeface="微軟正黑體" panose="020B0604030504040204" pitchFamily="34" charset="-120"/>
             </a:endParaRPr>
@@ -13544,11 +13622,32 @@
               <a:buChar char="•"/>
             </a:pPr>
             <a:r>
+              <a:rPr lang="en-US" altLang="zh-TW" sz="3200" dirty="0">
+                <a:latin typeface="微軟正黑體" panose="020B0604030504040204" pitchFamily="34" charset="-120"/>
+                <a:ea typeface="微軟正黑體" panose="020B0604030504040204" pitchFamily="34" charset="-120"/>
+              </a:rPr>
+              <a:t>OpenAI</a:t>
+            </a:r>
+            <a:r>
               <a:rPr lang="zh-TW" altLang="en-US" sz="3200" dirty="0">
                 <a:latin typeface="微軟正黑體" panose="020B0604030504040204" pitchFamily="34" charset="-120"/>
                 <a:ea typeface="微軟正黑體" panose="020B0604030504040204" pitchFamily="34" charset="-120"/>
               </a:rPr>
-              <a:t>添加可能對模型有用的其他輸入</a:t>
+              <a:t>的</a:t>
+            </a:r>
+            <a:r>
+              <a:rPr lang="en-US" altLang="zh-TW" sz="3200" dirty="0" err="1">
+                <a:latin typeface="微軟正黑體" panose="020B0604030504040204" pitchFamily="34" charset="-120"/>
+                <a:ea typeface="微軟正黑體" panose="020B0604030504040204" pitchFamily="34" charset="-120"/>
+              </a:rPr>
+              <a:t>tiktoken</a:t>
+            </a:r>
+            <a:r>
+              <a:rPr lang="zh-TW" altLang="en-US" sz="3200" dirty="0">
+                <a:latin typeface="微軟正黑體" panose="020B0604030504040204" pitchFamily="34" charset="-120"/>
+                <a:ea typeface="微軟正黑體" panose="020B0604030504040204" pitchFamily="34" charset="-120"/>
+              </a:rPr>
+              <a:t>只能分配不能訓練</a:t>
             </a:r>
             <a:endParaRPr lang="en-US" altLang="zh-TW" sz="3200" dirty="0">
               <a:latin typeface="微軟正黑體" panose="020B0604030504040204" pitchFamily="34" charset="-120"/>
@@ -13561,11 +13660,60 @@
               <a:buChar char="•"/>
             </a:pPr>
             <a:r>
+              <a:rPr lang="en-US" altLang="zh-TW" sz="3200" dirty="0">
+                <a:latin typeface="微軟正黑體" panose="020B0604030504040204" pitchFamily="34" charset="-120"/>
+                <a:ea typeface="微軟正黑體" panose="020B0604030504040204" pitchFamily="34" charset="-120"/>
+              </a:rPr>
+              <a:t>Google</a:t>
+            </a:r>
+            <a:r>
               <a:rPr lang="zh-TW" altLang="en-US" sz="3200" dirty="0">
                 <a:latin typeface="微軟正黑體" panose="020B0604030504040204" pitchFamily="34" charset="-120"/>
                 <a:ea typeface="微軟正黑體" panose="020B0604030504040204" pitchFamily="34" charset="-120"/>
               </a:rPr>
-              <a:t>預處理都要以模型預訓練時完全相同的方式完成</a:t>
+              <a:t>的</a:t>
+            </a:r>
+            <a:r>
+              <a:rPr lang="en-US" altLang="zh-TW" sz="3200" dirty="0" err="1">
+                <a:latin typeface="微軟正黑體" panose="020B0604030504040204" pitchFamily="34" charset="-120"/>
+                <a:ea typeface="微軟正黑體" panose="020B0604030504040204" pitchFamily="34" charset="-120"/>
+              </a:rPr>
+              <a:t>sentencepiece</a:t>
+            </a:r>
+            <a:r>
+              <a:rPr lang="zh-TW" altLang="en-US" sz="3200" dirty="0">
+                <a:latin typeface="微軟正黑體" panose="020B0604030504040204" pitchFamily="34" charset="-120"/>
+                <a:ea typeface="微軟正黑體" panose="020B0604030504040204" pitchFamily="34" charset="-120"/>
+              </a:rPr>
+              <a:t>，</a:t>
+            </a:r>
+            <a:r>
+              <a:rPr lang="en-US" altLang="zh-TW" sz="3200" dirty="0" err="1">
+                <a:latin typeface="微軟正黑體" panose="020B0604030504040204" pitchFamily="34" charset="-120"/>
+                <a:ea typeface="微軟正黑體" panose="020B0604030504040204" pitchFamily="34" charset="-120"/>
+              </a:rPr>
+              <a:t>huggingface</a:t>
+            </a:r>
+            <a:r>
+              <a:rPr lang="zh-TW" altLang="en-US" sz="3200" dirty="0">
+                <a:latin typeface="微軟正黑體" panose="020B0604030504040204" pitchFamily="34" charset="-120"/>
+                <a:ea typeface="微軟正黑體" panose="020B0604030504040204" pitchFamily="34" charset="-120"/>
+              </a:rPr>
+              <a:t>的</a:t>
+            </a:r>
+            <a:r>
+              <a:rPr lang="en-US" altLang="zh-TW" sz="3200" dirty="0" err="1">
+                <a:latin typeface="微軟正黑體" panose="020B0604030504040204" pitchFamily="34" charset="-120"/>
+                <a:ea typeface="微軟正黑體" panose="020B0604030504040204" pitchFamily="34" charset="-120"/>
+              </a:rPr>
+              <a:t>BPETrainer</a:t>
+            </a:r>
+            <a:r>
+              <a:rPr lang="zh-TW" altLang="en-US" sz="3200" dirty="0">
+                <a:latin typeface="微軟正黑體" panose="020B0604030504040204" pitchFamily="34" charset="-120"/>
+                <a:ea typeface="微軟正黑體" panose="020B0604030504040204" pitchFamily="34" charset="-120"/>
+              </a:rPr>
+              <a:t>等</a:t>
             </a:r>
             <a:endParaRPr lang="en-US" altLang="zh-TW" sz="3200" dirty="0">
               <a:latin typeface="微軟正黑體" panose="020B0604030504040204" pitchFamily="34" charset="-120"/>
@@ -13576,7 +13724,13 @@
       </p:sp>
       <p:sp>
         <p:nvSpPr>
-          <p:cNvPr id="4" name="文字版面配置區 2"/>
+          <p:cNvPr id="4" name="文字版面配置區 2">
+            <a:extLst>
+              <a:ext uri="{FF2B5EF4-FFF2-40B4-BE49-F238E27FC236}">
+                <a16:creationId xmlns:a16="http://schemas.microsoft.com/office/drawing/2014/main" id="{910DA16F-FE21-2EF8-E713-ACFC0D19C08C}"/>
+              </a:ext>
+            </a:extLst>
+          </p:cNvPr>
           <p:cNvSpPr txBox="1">
             <a:spLocks/>
           </p:cNvSpPr>
@@ -13584,8 +13738,8 @@
         </p:nvSpPr>
         <p:spPr>
           <a:xfrm>
-            <a:off x="1295400" y="304800"/>
-            <a:ext cx="6477000" cy="990600"/>
+            <a:off x="2898112" y="334945"/>
+            <a:ext cx="3462495" cy="990600"/>
           </a:xfrm>
           <a:prstGeom prst="rect">
             <a:avLst/>
@@ -13635,7 +13789,7 @@
                 <a:ea typeface="微軟正黑體" panose="020B0604030504040204" pitchFamily="34" charset="-120"/>
                 <a:cs typeface="+mn-cs"/>
               </a:rPr>
-              <a:t>分詞預處理</a:t>
+              <a:t>訓練分詞器</a:t>
             </a:r>
           </a:p>
         </p:txBody>
@@ -13643,7 +13797,7 @@
     </p:spTree>
     <p:extLst>
       <p:ext uri="{BB962C8B-B14F-4D97-AF65-F5344CB8AC3E}">
-        <p14:creationId xmlns:p14="http://schemas.microsoft.com/office/powerpoint/2010/main" val="1931395473"/>
+        <p14:creationId xmlns:p14="http://schemas.microsoft.com/office/powerpoint/2010/main" val="370821161"/>
       </p:ext>
     </p:extLst>
   </p:cSld>
@@ -13673,6 +13827,69 @@
           <a:chExt cx="0" cy="0"/>
         </a:xfrm>
       </p:grpSpPr>
+      <p:pic>
+        <p:nvPicPr>
+          <p:cNvPr id="5" name="圖片 4">
+            <a:extLst>
+              <a:ext uri="{FF2B5EF4-FFF2-40B4-BE49-F238E27FC236}">
+                <a16:creationId xmlns:a16="http://schemas.microsoft.com/office/drawing/2014/main" id="{38A053FF-FF44-973B-8861-9ED421996E7D}"/>
+              </a:ext>
+            </a:extLst>
+          </p:cNvPr>
+          <p:cNvPicPr>
+            <a:picLocks noChangeAspect="1"/>
+          </p:cNvPicPr>
+          <p:nvPr/>
+        </p:nvPicPr>
+        <p:blipFill>
+          <a:blip r:embed="rId2"/>
+          <a:stretch>
+            <a:fillRect/>
+          </a:stretch>
+        </p:blipFill>
+        <p:spPr>
+          <a:xfrm>
+            <a:off x="447151" y="517473"/>
+            <a:ext cx="8490857" cy="6188564"/>
+          </a:xfrm>
+          <a:prstGeom prst="rect">
+            <a:avLst/>
+          </a:prstGeom>
+        </p:spPr>
+      </p:pic>
+    </p:spTree>
+    <p:extLst>
+      <p:ext uri="{BB962C8B-B14F-4D97-AF65-F5344CB8AC3E}">
+        <p14:creationId xmlns:p14="http://schemas.microsoft.com/office/powerpoint/2010/main" val="668911436"/>
+      </p:ext>
+    </p:extLst>
+  </p:cSld>
+  <p:clrMapOvr>
+    <a:masterClrMapping/>
+  </p:clrMapOvr>
+  <p:transition>
+    <p:fade/>
+  </p:transition>
+</p:sld>
+</file>
+
+<file path=ppt/slides/slide12.xml><?xml version="1.0" encoding="utf-8"?>
+<p:sld xmlns:a="http://schemas.openxmlformats.org/drawingml/2006/main" xmlns:r="http://schemas.openxmlformats.org/officeDocument/2006/relationships" xmlns:p="http://schemas.openxmlformats.org/presentationml/2006/main">
+  <p:cSld>
+    <p:spTree>
+      <p:nvGrpSpPr>
+        <p:cNvPr id="1" name=""/>
+        <p:cNvGrpSpPr/>
+        <p:nvPr/>
+      </p:nvGrpSpPr>
+      <p:grpSpPr>
+        <a:xfrm>
+          <a:off x="0" y="0"/>
+          <a:ext cx="0" cy="0"/>
+          <a:chOff x="0" y="0"/>
+          <a:chExt cx="0" cy="0"/>
+        </a:xfrm>
+      </p:grpSpPr>
       <p:sp>
         <p:nvSpPr>
           <p:cNvPr id="5" name="文字方塊 4"/>
@@ -13700,25 +13917,110 @@
               <a:buChar char="•"/>
             </a:pPr>
             <a:r>
+              <a:rPr lang="en-US" altLang="zh-TW" sz="3200" dirty="0">
+                <a:latin typeface="微軟正黑體" panose="020B0604030504040204" pitchFamily="34" charset="-120"/>
+                <a:ea typeface="微軟正黑體" panose="020B0604030504040204" pitchFamily="34" charset="-120"/>
+              </a:rPr>
+              <a:t>Transformer </a:t>
+            </a:r>
+            <a:r>
               <a:rPr lang="zh-TW" altLang="en-US" sz="3200" dirty="0">
                 <a:latin typeface="微軟正黑體" panose="020B0604030504040204" pitchFamily="34" charset="-120"/>
                 <a:ea typeface="微軟正黑體" panose="020B0604030504040204" pitchFamily="34" charset="-120"/>
               </a:rPr>
-              <a:t>首先</a:t>
+              <a:t>模型無法處理文字，第一步是將文字輸入轉換為模型理解的數字，使用</a:t>
             </a:r>
             <a:r>
               <a:rPr lang="en-US" altLang="zh-TW" sz="3200" dirty="0">
                 <a:latin typeface="微軟正黑體" panose="020B0604030504040204" pitchFamily="34" charset="-120"/>
                 <a:ea typeface="微軟正黑體" panose="020B0604030504040204" pitchFamily="34" charset="-120"/>
               </a:rPr>
-              <a:t>Model Hub</a:t>
-            </a:r>
+              <a:t>tokenizer</a:t>
+            </a:r>
+          </a:p>
+          <a:p>
+            <a:pPr marL="514350" indent="-514350">
+              <a:buFont typeface="Arial" panose="020B0604020202020204" pitchFamily="34" charset="0"/>
+              <a:buChar char="•"/>
+            </a:pPr>
             <a:r>
               <a:rPr lang="zh-TW" altLang="en-US" sz="3200" dirty="0">
                 <a:latin typeface="微軟正黑體" panose="020B0604030504040204" pitchFamily="34" charset="-120"/>
                 <a:ea typeface="微軟正黑體" panose="020B0604030504040204" pitchFamily="34" charset="-120"/>
               </a:rPr>
-              <a:t>中下載這些設定</a:t>
+              <a:t>將輸入拆分為單詞、子單詞或符號（如標點符號），稱為標記</a:t>
+            </a:r>
+            <a:r>
+              <a:rPr lang="en-US" altLang="zh-TW" sz="3200" dirty="0">
+                <a:latin typeface="微軟正黑體" panose="020B0604030504040204" pitchFamily="34" charset="-120"/>
+                <a:ea typeface="微軟正黑體" panose="020B0604030504040204" pitchFamily="34" charset="-120"/>
+              </a:rPr>
+              <a:t>(token)</a:t>
+            </a:r>
+          </a:p>
+          <a:p>
+            <a:pPr marL="514350" indent="-514350">
+              <a:buFont typeface="Arial" panose="020B0604020202020204" pitchFamily="34" charset="0"/>
+              <a:buChar char="•"/>
+            </a:pPr>
+            <a:r>
+              <a:rPr lang="zh-TW" altLang="en-US" sz="3200" dirty="0">
+                <a:latin typeface="微軟正黑體" panose="020B0604030504040204" pitchFamily="34" charset="-120"/>
+                <a:ea typeface="微軟正黑體" panose="020B0604030504040204" pitchFamily="34" charset="-120"/>
+              </a:rPr>
+              <a:t>將每個標記</a:t>
+            </a:r>
+            <a:r>
+              <a:rPr lang="en-US" altLang="zh-TW" sz="3200" dirty="0">
+                <a:latin typeface="微軟正黑體" panose="020B0604030504040204" pitchFamily="34" charset="-120"/>
+                <a:ea typeface="微軟正黑體" panose="020B0604030504040204" pitchFamily="34" charset="-120"/>
+              </a:rPr>
+              <a:t>(token)</a:t>
+            </a:r>
+            <a:r>
+              <a:rPr lang="zh-TW" altLang="en-US" sz="3200" dirty="0">
+                <a:latin typeface="微軟正黑體" panose="020B0604030504040204" pitchFamily="34" charset="-120"/>
+                <a:ea typeface="微軟正黑體" panose="020B0604030504040204" pitchFamily="34" charset="-120"/>
+              </a:rPr>
+              <a:t>映射到一個整數</a:t>
+            </a:r>
+            <a:r>
+              <a:rPr lang="en-US" altLang="zh-TW" sz="3200" dirty="0">
+                <a:latin typeface="微軟正黑體" panose="020B0604030504040204" pitchFamily="34" charset="-120"/>
+                <a:ea typeface="微軟正黑體" panose="020B0604030504040204" pitchFamily="34" charset="-120"/>
+              </a:rPr>
+              <a:t>(</a:t>
+            </a:r>
+            <a:r>
+              <a:rPr lang="zh-TW" altLang="en-US" sz="3200" dirty="0">
+                <a:latin typeface="微軟正黑體" panose="020B0604030504040204" pitchFamily="34" charset="-120"/>
+                <a:ea typeface="微軟正黑體" panose="020B0604030504040204" pitchFamily="34" charset="-120"/>
+              </a:rPr>
+              <a:t>編號</a:t>
+            </a:r>
+            <a:r>
+              <a:rPr lang="en-US" altLang="zh-TW" sz="3200" dirty="0">
+                <a:latin typeface="微軟正黑體" panose="020B0604030504040204" pitchFamily="34" charset="-120"/>
+                <a:ea typeface="微軟正黑體" panose="020B0604030504040204" pitchFamily="34" charset="-120"/>
+              </a:rPr>
+              <a:t>)</a:t>
+            </a:r>
+            <a:endParaRPr lang="zh-TW" altLang="en-US" sz="3200" dirty="0">
+              <a:latin typeface="微軟正黑體" panose="020B0604030504040204" pitchFamily="34" charset="-120"/>
+              <a:ea typeface="微軟正黑體" panose="020B0604030504040204" pitchFamily="34" charset="-120"/>
+            </a:endParaRPr>
+          </a:p>
+          <a:p>
+            <a:pPr marL="514350" indent="-514350">
+              <a:buFont typeface="Arial" panose="020B0604020202020204" pitchFamily="34" charset="0"/>
+              <a:buChar char="•"/>
+            </a:pPr>
+            <a:r>
+              <a:rPr lang="zh-TW" altLang="en-US" sz="3200" dirty="0">
+                <a:latin typeface="微軟正黑體" panose="020B0604030504040204" pitchFamily="34" charset="-120"/>
+                <a:ea typeface="微軟正黑體" panose="020B0604030504040204" pitchFamily="34" charset="-120"/>
+              </a:rPr>
+              <a:t>添加可能對模型有用的其他輸入</a:t>
             </a:r>
             <a:endParaRPr lang="en-US" altLang="zh-TW" sz="3200" dirty="0">
               <a:latin typeface="微軟正黑體" panose="020B0604030504040204" pitchFamily="34" charset="-120"/>
@@ -13735,150 +14037,12 @@
                 <a:latin typeface="微軟正黑體" panose="020B0604030504040204" pitchFamily="34" charset="-120"/>
                 <a:ea typeface="微軟正黑體" panose="020B0604030504040204" pitchFamily="34" charset="-120"/>
               </a:rPr>
-              <a:t>使用</a:t>
-            </a:r>
-            <a:r>
-              <a:rPr lang="en-US" altLang="zh-TW" sz="3200" dirty="0" err="1">
-                <a:latin typeface="微軟正黑體" panose="020B0604030504040204" pitchFamily="34" charset="-120"/>
-                <a:ea typeface="微軟正黑體" panose="020B0604030504040204" pitchFamily="34" charset="-120"/>
-              </a:rPr>
-              <a:t>AutoTokenizer</a:t>
-            </a:r>
-            <a:r>
-              <a:rPr lang="zh-TW" altLang="en-US" sz="3200" dirty="0">
-                <a:latin typeface="微軟正黑體" panose="020B0604030504040204" pitchFamily="34" charset="-120"/>
-                <a:ea typeface="微軟正黑體" panose="020B0604030504040204" pitchFamily="34" charset="-120"/>
-              </a:rPr>
-              <a:t>類別及</a:t>
-            </a:r>
-            <a:r>
-              <a:rPr lang="en-US" altLang="zh-TW" sz="3200" dirty="0" err="1">
-                <a:latin typeface="微軟正黑體" panose="020B0604030504040204" pitchFamily="34" charset="-120"/>
-                <a:ea typeface="微軟正黑體" panose="020B0604030504040204" pitchFamily="34" charset="-120"/>
-              </a:rPr>
-              <a:t>from_pretrained</a:t>
-            </a:r>
-            <a:r>
-              <a:rPr lang="en-US" altLang="zh-TW" sz="3200" dirty="0">
-                <a:latin typeface="微軟正黑體" panose="020B0604030504040204" pitchFamily="34" charset="-120"/>
-                <a:ea typeface="微軟正黑體" panose="020B0604030504040204" pitchFamily="34" charset="-120"/>
-              </a:rPr>
-              <a:t>()</a:t>
-            </a:r>
-            <a:r>
-              <a:rPr lang="zh-TW" altLang="en-US" sz="3200" dirty="0">
-                <a:latin typeface="微軟正黑體" panose="020B0604030504040204" pitchFamily="34" charset="-120"/>
-                <a:ea typeface="微軟正黑體" panose="020B0604030504040204" pitchFamily="34" charset="-120"/>
-              </a:rPr>
-              <a:t>方法</a:t>
+              <a:t>預處理都要以模型預訓練時完全相同的方式完成</a:t>
             </a:r>
             <a:endParaRPr lang="en-US" altLang="zh-TW" sz="3200" dirty="0">
               <a:latin typeface="微軟正黑體" panose="020B0604030504040204" pitchFamily="34" charset="-120"/>
               <a:ea typeface="微軟正黑體" panose="020B0604030504040204" pitchFamily="34" charset="-120"/>
             </a:endParaRPr>
-          </a:p>
-          <a:p>
-            <a:pPr marL="514350" indent="-514350">
-              <a:buFont typeface="Arial" panose="020B0604020202020204" pitchFamily="34" charset="0"/>
-              <a:buChar char="•"/>
-            </a:pPr>
-            <a:r>
-              <a:rPr lang="zh-TW" altLang="en-US" sz="3200" dirty="0">
-                <a:latin typeface="微軟正黑體" panose="020B0604030504040204" pitchFamily="34" charset="-120"/>
-                <a:ea typeface="微軟正黑體" panose="020B0604030504040204" pitchFamily="34" charset="-120"/>
-              </a:rPr>
-              <a:t>使用模型的</a:t>
-            </a:r>
-            <a:r>
-              <a:rPr lang="en-US" altLang="zh-TW" sz="3200" dirty="0">
-                <a:latin typeface="微軟正黑體" panose="020B0604030504040204" pitchFamily="34" charset="-120"/>
-                <a:ea typeface="微軟正黑體" panose="020B0604030504040204" pitchFamily="34" charset="-120"/>
-              </a:rPr>
-              <a:t>checkpoint</a:t>
-            </a:r>
-            <a:r>
-              <a:rPr lang="zh-TW" altLang="en-US" sz="3200" dirty="0">
-                <a:latin typeface="微軟正黑體" panose="020B0604030504040204" pitchFamily="34" charset="-120"/>
-                <a:ea typeface="微軟正黑體" panose="020B0604030504040204" pitchFamily="34" charset="-120"/>
-              </a:rPr>
-              <a:t>自動獲取與模型的</a:t>
-            </a:r>
-            <a:r>
-              <a:rPr lang="en-US" altLang="zh-TW" sz="3200" dirty="0">
-                <a:latin typeface="微軟正黑體" panose="020B0604030504040204" pitchFamily="34" charset="-120"/>
-                <a:ea typeface="微軟正黑體" panose="020B0604030504040204" pitchFamily="34" charset="-120"/>
-              </a:rPr>
-              <a:t>tokenizer</a:t>
-            </a:r>
-            <a:r>
-              <a:rPr lang="zh-TW" altLang="en-US" sz="3200" dirty="0">
-                <a:latin typeface="微軟正黑體" panose="020B0604030504040204" pitchFamily="34" charset="-120"/>
-                <a:ea typeface="微軟正黑體" panose="020B0604030504040204" pitchFamily="34" charset="-120"/>
-              </a:rPr>
-              <a:t>相關聯的資料</a:t>
-            </a:r>
-            <a:endParaRPr lang="en-US" altLang="zh-TW" sz="3200" dirty="0">
-              <a:latin typeface="微軟正黑體" panose="020B0604030504040204" pitchFamily="34" charset="-120"/>
-              <a:ea typeface="微軟正黑體" panose="020B0604030504040204" pitchFamily="34" charset="-120"/>
-            </a:endParaRPr>
-          </a:p>
-          <a:p>
-            <a:pPr marL="514350" indent="-514350">
-              <a:buFont typeface="Arial" panose="020B0604020202020204" pitchFamily="34" charset="0"/>
-              <a:buChar char="•"/>
-            </a:pPr>
-            <a:r>
-              <a:rPr lang="zh-TW" altLang="en-US" sz="3200" dirty="0">
-                <a:latin typeface="微軟正黑體" panose="020B0604030504040204" pitchFamily="34" charset="-120"/>
-                <a:ea typeface="微軟正黑體" panose="020B0604030504040204" pitchFamily="34" charset="-120"/>
-              </a:rPr>
-              <a:t>第一次運行時才會下載，之後存在電腦中</a:t>
-            </a:r>
-            <a:endParaRPr lang="en-US" altLang="zh-TW" sz="3200" dirty="0">
-              <a:latin typeface="微軟正黑體" panose="020B0604030504040204" pitchFamily="34" charset="-120"/>
-              <a:ea typeface="微軟正黑體" panose="020B0604030504040204" pitchFamily="34" charset="-120"/>
-            </a:endParaRPr>
-          </a:p>
-          <a:p>
-            <a:pPr marL="514350" indent="-514350">
-              <a:buFont typeface="Arial" panose="020B0604020202020204" pitchFamily="34" charset="0"/>
-              <a:buChar char="•"/>
-            </a:pPr>
-            <a:r>
-              <a:rPr lang="en-US" altLang="zh-TW" sz="3200" dirty="0">
-                <a:latin typeface="微軟正黑體" panose="020B0604030504040204" pitchFamily="34" charset="-120"/>
-                <a:ea typeface="微軟正黑體" panose="020B0604030504040204" pitchFamily="34" charset="-120"/>
-              </a:rPr>
-              <a:t>sentiment-analysis</a:t>
-            </a:r>
-            <a:r>
-              <a:rPr lang="zh-TW" altLang="en-US" sz="3200" dirty="0">
-                <a:latin typeface="微軟正黑體" panose="020B0604030504040204" pitchFamily="34" charset="-120"/>
-                <a:ea typeface="微軟正黑體" panose="020B0604030504040204" pitchFamily="34" charset="-120"/>
-              </a:rPr>
-              <a:t>管道的預設</a:t>
-            </a:r>
-            <a:r>
-              <a:rPr lang="en-US" altLang="zh-TW" sz="3200" dirty="0">
-                <a:latin typeface="微軟正黑體" panose="020B0604030504040204" pitchFamily="34" charset="-120"/>
-                <a:ea typeface="微軟正黑體" panose="020B0604030504040204" pitchFamily="34" charset="-120"/>
-              </a:rPr>
-              <a:t>checkpoint</a:t>
-            </a:r>
-            <a:r>
-              <a:rPr lang="zh-TW" altLang="en-US" sz="3200" dirty="0">
-                <a:latin typeface="微軟正黑體" panose="020B0604030504040204" pitchFamily="34" charset="-120"/>
-                <a:ea typeface="微軟正黑體" panose="020B0604030504040204" pitchFamily="34" charset="-120"/>
-              </a:rPr>
-              <a:t>是</a:t>
-            </a:r>
-            <a:r>
-              <a:rPr lang="en-US" altLang="zh-TW" sz="3200" dirty="0">
-                <a:latin typeface="微軟正黑體" panose="020B0604030504040204" pitchFamily="34" charset="-120"/>
-                <a:ea typeface="微軟正黑體" panose="020B0604030504040204" pitchFamily="34" charset="-120"/>
-              </a:rPr>
-              <a:t>distilbert-base-uncased-finetuned-sst-2-english</a:t>
-            </a:r>
           </a:p>
         </p:txBody>
       </p:sp>
@@ -13951,6 +14115,273 @@
     </p:spTree>
     <p:extLst>
       <p:ext uri="{BB962C8B-B14F-4D97-AF65-F5344CB8AC3E}">
+        <p14:creationId xmlns:p14="http://schemas.microsoft.com/office/powerpoint/2010/main" val="1931395473"/>
+      </p:ext>
+    </p:extLst>
+  </p:cSld>
+  <p:clrMapOvr>
+    <a:masterClrMapping/>
+  </p:clrMapOvr>
+  <p:transition>
+    <p:fade/>
+  </p:transition>
+</p:sld>
+</file>
+
+<file path=ppt/slides/slide13.xml><?xml version="1.0" encoding="utf-8"?>
+<p:sld xmlns:a="http://schemas.openxmlformats.org/drawingml/2006/main" xmlns:r="http://schemas.openxmlformats.org/officeDocument/2006/relationships" xmlns:p="http://schemas.openxmlformats.org/presentationml/2006/main">
+  <p:cSld>
+    <p:spTree>
+      <p:nvGrpSpPr>
+        <p:cNvPr id="1" name=""/>
+        <p:cNvGrpSpPr/>
+        <p:nvPr/>
+      </p:nvGrpSpPr>
+      <p:grpSpPr>
+        <a:xfrm>
+          <a:off x="0" y="0"/>
+          <a:ext cx="0" cy="0"/>
+          <a:chOff x="0" y="0"/>
+          <a:chExt cx="0" cy="0"/>
+        </a:xfrm>
+      </p:grpSpPr>
+      <p:sp>
+        <p:nvSpPr>
+          <p:cNvPr id="5" name="文字方塊 4"/>
+          <p:cNvSpPr txBox="1"/>
+          <p:nvPr/>
+        </p:nvSpPr>
+        <p:spPr>
+          <a:xfrm>
+            <a:off x="685800" y="1828800"/>
+            <a:ext cx="8077200" cy="3046988"/>
+          </a:xfrm>
+          <a:prstGeom prst="rect">
+            <a:avLst/>
+          </a:prstGeom>
+          <a:noFill/>
+        </p:spPr>
+        <p:txBody>
+          <a:bodyPr wrap="square" rtlCol="0">
+            <a:spAutoFit/>
+          </a:bodyPr>
+          <a:lstStyle/>
+          <a:p>
+            <a:pPr marL="514350" indent="-514350">
+              <a:buFont typeface="Arial" panose="020B0604020202020204" pitchFamily="34" charset="0"/>
+              <a:buChar char="•"/>
+            </a:pPr>
+            <a:r>
+              <a:rPr lang="zh-TW" altLang="en-US" sz="3200" dirty="0">
+                <a:latin typeface="微軟正黑體" panose="020B0604030504040204" pitchFamily="34" charset="-120"/>
+                <a:ea typeface="微軟正黑體" panose="020B0604030504040204" pitchFamily="34" charset="-120"/>
+              </a:rPr>
+              <a:t>首先</a:t>
+            </a:r>
+            <a:r>
+              <a:rPr lang="en-US" altLang="zh-TW" sz="3200" dirty="0">
+                <a:latin typeface="微軟正黑體" panose="020B0604030504040204" pitchFamily="34" charset="-120"/>
+                <a:ea typeface="微軟正黑體" panose="020B0604030504040204" pitchFamily="34" charset="-120"/>
+              </a:rPr>
+              <a:t>Model Hub</a:t>
+            </a:r>
+            <a:r>
+              <a:rPr lang="zh-TW" altLang="en-US" sz="3200" dirty="0">
+                <a:latin typeface="微軟正黑體" panose="020B0604030504040204" pitchFamily="34" charset="-120"/>
+                <a:ea typeface="微軟正黑體" panose="020B0604030504040204" pitchFamily="34" charset="-120"/>
+              </a:rPr>
+              <a:t>中下載這些設定</a:t>
+            </a:r>
+            <a:endParaRPr lang="en-US" altLang="zh-TW" sz="3200" dirty="0">
+              <a:latin typeface="微軟正黑體" panose="020B0604030504040204" pitchFamily="34" charset="-120"/>
+              <a:ea typeface="微軟正黑體" panose="020B0604030504040204" pitchFamily="34" charset="-120"/>
+            </a:endParaRPr>
+          </a:p>
+          <a:p>
+            <a:pPr marL="514350" indent="-514350">
+              <a:buFont typeface="Arial" panose="020B0604020202020204" pitchFamily="34" charset="0"/>
+              <a:buChar char="•"/>
+            </a:pPr>
+            <a:r>
+              <a:rPr lang="zh-TW" altLang="en-US" sz="3200" dirty="0">
+                <a:latin typeface="微軟正黑體" panose="020B0604030504040204" pitchFamily="34" charset="-120"/>
+                <a:ea typeface="微軟正黑體" panose="020B0604030504040204" pitchFamily="34" charset="-120"/>
+              </a:rPr>
+              <a:t>使用</a:t>
+            </a:r>
+            <a:r>
+              <a:rPr lang="en-US" altLang="zh-TW" sz="3200" dirty="0" err="1">
+                <a:latin typeface="微軟正黑體" panose="020B0604030504040204" pitchFamily="34" charset="-120"/>
+                <a:ea typeface="微軟正黑體" panose="020B0604030504040204" pitchFamily="34" charset="-120"/>
+              </a:rPr>
+              <a:t>AutoTokenizer</a:t>
+            </a:r>
+            <a:r>
+              <a:rPr lang="zh-TW" altLang="en-US" sz="3200" dirty="0">
+                <a:latin typeface="微軟正黑體" panose="020B0604030504040204" pitchFamily="34" charset="-120"/>
+                <a:ea typeface="微軟正黑體" panose="020B0604030504040204" pitchFamily="34" charset="-120"/>
+              </a:rPr>
+              <a:t>類別及</a:t>
+            </a:r>
+            <a:r>
+              <a:rPr lang="en-US" altLang="zh-TW" sz="3200" dirty="0" err="1">
+                <a:latin typeface="微軟正黑體" panose="020B0604030504040204" pitchFamily="34" charset="-120"/>
+                <a:ea typeface="微軟正黑體" panose="020B0604030504040204" pitchFamily="34" charset="-120"/>
+              </a:rPr>
+              <a:t>from_pretrained</a:t>
+            </a:r>
+            <a:r>
+              <a:rPr lang="en-US" altLang="zh-TW" sz="3200" dirty="0">
+                <a:latin typeface="微軟正黑體" panose="020B0604030504040204" pitchFamily="34" charset="-120"/>
+                <a:ea typeface="微軟正黑體" panose="020B0604030504040204" pitchFamily="34" charset="-120"/>
+              </a:rPr>
+              <a:t>()</a:t>
+            </a:r>
+            <a:r>
+              <a:rPr lang="zh-TW" altLang="en-US" sz="3200" dirty="0">
+                <a:latin typeface="微軟正黑體" panose="020B0604030504040204" pitchFamily="34" charset="-120"/>
+                <a:ea typeface="微軟正黑體" panose="020B0604030504040204" pitchFamily="34" charset="-120"/>
+              </a:rPr>
+              <a:t>方法</a:t>
+            </a:r>
+            <a:endParaRPr lang="en-US" altLang="zh-TW" sz="3200" dirty="0">
+              <a:latin typeface="微軟正黑體" panose="020B0604030504040204" pitchFamily="34" charset="-120"/>
+              <a:ea typeface="微軟正黑體" panose="020B0604030504040204" pitchFamily="34" charset="-120"/>
+            </a:endParaRPr>
+          </a:p>
+          <a:p>
+            <a:pPr marL="514350" indent="-514350">
+              <a:buFont typeface="Arial" panose="020B0604020202020204" pitchFamily="34" charset="0"/>
+              <a:buChar char="•"/>
+            </a:pPr>
+            <a:r>
+              <a:rPr lang="zh-TW" altLang="en-US" sz="3200" dirty="0">
+                <a:latin typeface="微軟正黑體" panose="020B0604030504040204" pitchFamily="34" charset="-120"/>
+                <a:ea typeface="微軟正黑體" panose="020B0604030504040204" pitchFamily="34" charset="-120"/>
+              </a:rPr>
+              <a:t>使用模型的</a:t>
+            </a:r>
+            <a:r>
+              <a:rPr lang="en-US" altLang="zh-TW" sz="3200" dirty="0">
+                <a:latin typeface="微軟正黑體" panose="020B0604030504040204" pitchFamily="34" charset="-120"/>
+                <a:ea typeface="微軟正黑體" panose="020B0604030504040204" pitchFamily="34" charset="-120"/>
+              </a:rPr>
+              <a:t>checkpoint</a:t>
+            </a:r>
+            <a:r>
+              <a:rPr lang="zh-TW" altLang="en-US" sz="3200" dirty="0">
+                <a:latin typeface="微軟正黑體" panose="020B0604030504040204" pitchFamily="34" charset="-120"/>
+                <a:ea typeface="微軟正黑體" panose="020B0604030504040204" pitchFamily="34" charset="-120"/>
+              </a:rPr>
+              <a:t>自動獲取與模型的</a:t>
+            </a:r>
+            <a:r>
+              <a:rPr lang="en-US" altLang="zh-TW" sz="3200" dirty="0">
+                <a:latin typeface="微軟正黑體" panose="020B0604030504040204" pitchFamily="34" charset="-120"/>
+                <a:ea typeface="微軟正黑體" panose="020B0604030504040204" pitchFamily="34" charset="-120"/>
+              </a:rPr>
+              <a:t>tokenizer</a:t>
+            </a:r>
+            <a:r>
+              <a:rPr lang="zh-TW" altLang="en-US" sz="3200" dirty="0">
+                <a:latin typeface="微軟正黑體" panose="020B0604030504040204" pitchFamily="34" charset="-120"/>
+                <a:ea typeface="微軟正黑體" panose="020B0604030504040204" pitchFamily="34" charset="-120"/>
+              </a:rPr>
+              <a:t>相關聯的資料</a:t>
+            </a:r>
+            <a:endParaRPr lang="en-US" altLang="zh-TW" sz="3200" dirty="0">
+              <a:latin typeface="微軟正黑體" panose="020B0604030504040204" pitchFamily="34" charset="-120"/>
+              <a:ea typeface="微軟正黑體" panose="020B0604030504040204" pitchFamily="34" charset="-120"/>
+            </a:endParaRPr>
+          </a:p>
+          <a:p>
+            <a:pPr marL="514350" indent="-514350">
+              <a:buFont typeface="Arial" panose="020B0604020202020204" pitchFamily="34" charset="0"/>
+              <a:buChar char="•"/>
+            </a:pPr>
+            <a:r>
+              <a:rPr lang="zh-TW" altLang="en-US" sz="3200" dirty="0">
+                <a:latin typeface="微軟正黑體" panose="020B0604030504040204" pitchFamily="34" charset="-120"/>
+                <a:ea typeface="微軟正黑體" panose="020B0604030504040204" pitchFamily="34" charset="-120"/>
+              </a:rPr>
+              <a:t>第一次運行時才會下載，之後存在電腦中</a:t>
+            </a:r>
+            <a:endParaRPr lang="en-US" altLang="zh-TW" sz="3200" dirty="0">
+              <a:latin typeface="微軟正黑體" panose="020B0604030504040204" pitchFamily="34" charset="-120"/>
+              <a:ea typeface="微軟正黑體" panose="020B0604030504040204" pitchFamily="34" charset="-120"/>
+            </a:endParaRPr>
+          </a:p>
+        </p:txBody>
+      </p:sp>
+      <p:sp>
+        <p:nvSpPr>
+          <p:cNvPr id="4" name="文字版面配置區 2"/>
+          <p:cNvSpPr txBox="1">
+            <a:spLocks/>
+          </p:cNvSpPr>
+          <p:nvPr/>
+        </p:nvSpPr>
+        <p:spPr>
+          <a:xfrm>
+            <a:off x="1295400" y="304800"/>
+            <a:ext cx="6477000" cy="990600"/>
+          </a:xfrm>
+          <a:prstGeom prst="rect">
+            <a:avLst/>
+          </a:prstGeom>
+        </p:spPr>
+        <p:txBody>
+          <a:bodyPr tIns="91440" bIns="91440" anchor="b" anchorCtr="0">
+            <a:noAutofit/>
+          </a:bodyPr>
+          <a:lstStyle/>
+          <a:p>
+            <a:pPr marL="0" marR="0" lvl="0" indent="0" algn="just" defTabSz="914400" rtl="0" eaLnBrk="1" fontAlgn="auto" latinLnBrk="0" hangingPunct="1">
+              <a:lnSpc>
+                <a:spcPct val="100000"/>
+              </a:lnSpc>
+              <a:spcBef>
+                <a:spcPct val="20000"/>
+              </a:spcBef>
+              <a:spcAft>
+                <a:spcPts val="0"/>
+              </a:spcAft>
+              <a:buClrTx/>
+              <a:buSzTx/>
+              <a:buFontTx/>
+              <a:buNone/>
+              <a:tabLst/>
+              <a:defRPr/>
+            </a:pPr>
+            <a:r>
+              <a:rPr kumimoji="0" lang="zh-TW" altLang="en-US" sz="4800" b="1" i="0" u="none" strike="noStrike" kern="0" cap="none" spc="0" normalizeH="0" baseline="0" noProof="0" dirty="0">
+                <a:ln>
+                  <a:noFill/>
+                </a:ln>
+                <a:solidFill>
+                  <a:srgbClr val="00B0F0"/>
+                </a:solidFill>
+                <a:effectLst>
+                  <a:outerShdw blurRad="38100" dist="38100" dir="2700000" algn="tl">
+                    <a:srgbClr val="000000">
+                      <a:alpha val="43137"/>
+                    </a:srgbClr>
+                  </a:outerShdw>
+                </a:effectLst>
+                <a:uLnTx/>
+                <a:uFillTx/>
+                <a:latin typeface="微軟正黑體" panose="020B0604030504040204" pitchFamily="34" charset="-120"/>
+                <a:ea typeface="微軟正黑體" panose="020B0604030504040204" pitchFamily="34" charset="-120"/>
+                <a:cs typeface="+mn-cs"/>
+              </a:rPr>
+              <a:t>分詞預處理</a:t>
+            </a:r>
+          </a:p>
+        </p:txBody>
+      </p:sp>
+    </p:spTree>
+    <p:extLst>
+      <p:ext uri="{BB962C8B-B14F-4D97-AF65-F5344CB8AC3E}">
         <p14:creationId xmlns:p14="http://schemas.microsoft.com/office/powerpoint/2010/main" val="1593249368"/>
       </p:ext>
     </p:extLst>
@@ -13964,7 +14395,7 @@
 </p:sld>
 </file>
 
-<file path=ppt/slides/slide12.xml><?xml version="1.0" encoding="utf-8"?>
+<file path=ppt/slides/slide14.xml><?xml version="1.0" encoding="utf-8"?>
 <p:sld xmlns:a="http://schemas.openxmlformats.org/drawingml/2006/main" xmlns:r="http://schemas.openxmlformats.org/officeDocument/2006/relationships" xmlns:p="http://schemas.openxmlformats.org/presentationml/2006/main">
   <p:cSld>
     <p:spTree>
@@ -14027,7 +14458,7 @@
 </p:sld>
 </file>
 
-<file path=ppt/slides/slide13.xml><?xml version="1.0" encoding="utf-8"?>
+<file path=ppt/slides/slide15.xml><?xml version="1.0" encoding="utf-8"?>
 <p:sld xmlns:a="http://schemas.openxmlformats.org/drawingml/2006/main" xmlns:r="http://schemas.openxmlformats.org/officeDocument/2006/relationships" xmlns:p="http://schemas.openxmlformats.org/presentationml/2006/main">
   <p:cSld>
     <p:spTree>
@@ -14275,7 +14706,7 @@
 </p:sld>
 </file>
 
-<file path=ppt/slides/slide14.xml><?xml version="1.0" encoding="utf-8"?>
+<file path=ppt/slides/slide16.xml><?xml version="1.0" encoding="utf-8"?>
 <p:sld xmlns:a="http://schemas.openxmlformats.org/drawingml/2006/main" xmlns:r="http://schemas.openxmlformats.org/officeDocument/2006/relationships" xmlns:p="http://schemas.openxmlformats.org/presentationml/2006/main">
   <p:cSld>
     <p:spTree>
@@ -14338,7 +14769,7 @@
 </p:sld>
 </file>
 
-<file path=ppt/slides/slide15.xml><?xml version="1.0" encoding="utf-8"?>
+<file path=ppt/slides/slide17.xml><?xml version="1.0" encoding="utf-8"?>
 <p:sld xmlns:a="http://schemas.openxmlformats.org/drawingml/2006/main" xmlns:r="http://schemas.openxmlformats.org/officeDocument/2006/relationships" xmlns:p="http://schemas.openxmlformats.org/presentationml/2006/main">
   <p:cSld>
     <p:spTree>
@@ -14609,7 +15040,7 @@
 </p:sld>
 </file>
 
-<file path=ppt/slides/slide16.xml><?xml version="1.0" encoding="utf-8"?>
+<file path=ppt/slides/slide18.xml><?xml version="1.0" encoding="utf-8"?>
 <p:sld xmlns:a="http://schemas.openxmlformats.org/drawingml/2006/main" xmlns:r="http://schemas.openxmlformats.org/officeDocument/2006/relationships" xmlns:p="http://schemas.openxmlformats.org/presentationml/2006/main">
   <p:cSld>
     <p:spTree>
@@ -14672,7 +15103,7 @@
 </p:sld>
 </file>
 
-<file path=ppt/slides/slide17.xml><?xml version="1.0" encoding="utf-8"?>
+<file path=ppt/slides/slide19.xml><?xml version="1.0" encoding="utf-8"?>
 <p:sld xmlns:a="http://schemas.openxmlformats.org/drawingml/2006/main" xmlns:r="http://schemas.openxmlformats.org/officeDocument/2006/relationships" xmlns:p="http://schemas.openxmlformats.org/presentationml/2006/main">
   <p:cSld>
     <p:spTree>
@@ -14907,7 +15338,7 @@
 </p:sld>
 </file>
 
-<file path=ppt/slides/slide18.xml><?xml version="1.0" encoding="utf-8"?>
+<file path=ppt/slides/slide2.xml><?xml version="1.0" encoding="utf-8"?>
 <p:sld xmlns:a="http://schemas.openxmlformats.org/drawingml/2006/main" xmlns:r="http://schemas.openxmlformats.org/officeDocument/2006/relationships" xmlns:p="http://schemas.openxmlformats.org/presentationml/2006/main">
   <p:cSld>
     <p:spTree>
@@ -14933,7 +15364,7 @@
         <p:spPr>
           <a:xfrm>
             <a:off x="685800" y="1828800"/>
-            <a:ext cx="8077200" cy="2554545"/>
+            <a:ext cx="8077200" cy="3539430"/>
           </a:xfrm>
           <a:prstGeom prst="rect">
             <a:avLst/>
@@ -14951,39 +15382,44 @@
               <a:buChar char="•"/>
             </a:pPr>
             <a:r>
+              <a:rPr lang="en-US" altLang="zh-TW" sz="3200" dirty="0">
+                <a:latin typeface="微軟正黑體" panose="020B0604030504040204" pitchFamily="34" charset="-120"/>
+                <a:ea typeface="微軟正黑體" panose="020B0604030504040204" pitchFamily="34" charset="-120"/>
+              </a:rPr>
+              <a:t>end-to-end pipeline</a:t>
+            </a:r>
+          </a:p>
+          <a:p>
+            <a:pPr marL="514350" indent="-514350">
+              <a:buFont typeface="Arial" panose="020B0604020202020204" pitchFamily="34" charset="0"/>
+              <a:buChar char="•"/>
+            </a:pPr>
+            <a:r>
               <a:rPr lang="zh-TW" altLang="en-US" sz="3200" dirty="0">
                 <a:latin typeface="微軟正黑體" panose="020B0604030504040204" pitchFamily="34" charset="-120"/>
                 <a:ea typeface="微軟正黑體" panose="020B0604030504040204" pitchFamily="34" charset="-120"/>
               </a:rPr>
-              <a:t>給定一些輸入，輸出內容隱藏狀態（</a:t>
+              <a:t>資料集</a:t>
             </a:r>
             <a:r>
               <a:rPr lang="en-US" altLang="zh-TW" sz="3200" dirty="0">
                 <a:latin typeface="微軟正黑體" panose="020B0604030504040204" pitchFamily="34" charset="-120"/>
                 <a:ea typeface="微軟正黑體" panose="020B0604030504040204" pitchFamily="34" charset="-120"/>
               </a:rPr>
-              <a:t>hidden states</a:t>
-            </a:r>
+              <a:t>dataset</a:t>
+            </a:r>
+          </a:p>
+          <a:p>
+            <a:pPr marL="514350" indent="-514350">
+              <a:buFont typeface="Arial" panose="020B0604020202020204" pitchFamily="34" charset="0"/>
+              <a:buChar char="•"/>
+            </a:pPr>
             <a:r>
               <a:rPr lang="zh-TW" altLang="en-US" sz="3200" dirty="0">
                 <a:latin typeface="微軟正黑體" panose="020B0604030504040204" pitchFamily="34" charset="-120"/>
                 <a:ea typeface="微軟正黑體" panose="020B0604030504040204" pitchFamily="34" charset="-120"/>
               </a:rPr>
-              <a:t>）亦稱特徵（</a:t>
-            </a:r>
-            <a:r>
-              <a:rPr lang="en-US" altLang="zh-TW" sz="3200" dirty="0">
-                <a:latin typeface="微軟正黑體" panose="020B0604030504040204" pitchFamily="34" charset="-120"/>
-                <a:ea typeface="微軟正黑體" panose="020B0604030504040204" pitchFamily="34" charset="-120"/>
-              </a:rPr>
-              <a:t>features</a:t>
-            </a:r>
-            <a:r>
-              <a:rPr lang="zh-TW" altLang="en-US" sz="3200" dirty="0">
-                <a:latin typeface="微軟正黑體" panose="020B0604030504040204" pitchFamily="34" charset="-120"/>
-                <a:ea typeface="微軟正黑體" panose="020B0604030504040204" pitchFamily="34" charset="-120"/>
-              </a:rPr>
-              <a:t>）</a:t>
+              <a:t>分詞預處理</a:t>
             </a:r>
             <a:endParaRPr lang="en-US" altLang="zh-TW" sz="3200" dirty="0">
               <a:latin typeface="微軟正黑體" panose="020B0604030504040204" pitchFamily="34" charset="-120"/>
@@ -15000,21 +15436,61 @@
                 <a:latin typeface="微軟正黑體" panose="020B0604030504040204" pitchFamily="34" charset="-120"/>
                 <a:ea typeface="微軟正黑體" panose="020B0604030504040204" pitchFamily="34" charset="-120"/>
               </a:rPr>
-              <a:t>對於每個模型輸入，獲得一組高維向量，表示</a:t>
+              <a:t>模型</a:t>
             </a:r>
             <a:r>
               <a:rPr lang="en-US" altLang="zh-TW" sz="3200" dirty="0">
                 <a:latin typeface="微軟正黑體" panose="020B0604030504040204" pitchFamily="34" charset="-120"/>
                 <a:ea typeface="微軟正黑體" panose="020B0604030504040204" pitchFamily="34" charset="-120"/>
               </a:rPr>
-              <a:t>Transformer</a:t>
-            </a:r>
+              <a:t>model</a:t>
+            </a:r>
+          </a:p>
+          <a:p>
+            <a:pPr marL="514350" indent="-514350">
+              <a:buFont typeface="Arial" panose="020B0604020202020204" pitchFamily="34" charset="0"/>
+              <a:buChar char="•"/>
+            </a:pPr>
             <a:r>
               <a:rPr lang="zh-TW" altLang="en-US" sz="3200" dirty="0">
                 <a:latin typeface="微軟正黑體" panose="020B0604030504040204" pitchFamily="34" charset="-120"/>
                 <a:ea typeface="微軟正黑體" panose="020B0604030504040204" pitchFamily="34" charset="-120"/>
               </a:rPr>
-              <a:t>模型對該輸入的上下文理解</a:t>
+              <a:t>高維向量</a:t>
+            </a:r>
+            <a:endParaRPr lang="en-US" altLang="zh-TW" sz="3200" dirty="0">
+              <a:latin typeface="微軟正黑體" panose="020B0604030504040204" pitchFamily="34" charset="-120"/>
+              <a:ea typeface="微軟正黑體" panose="020B0604030504040204" pitchFamily="34" charset="-120"/>
+            </a:endParaRPr>
+          </a:p>
+          <a:p>
+            <a:pPr marL="514350" indent="-514350">
+              <a:buFont typeface="Arial" panose="020B0604020202020204" pitchFamily="34" charset="0"/>
+              <a:buChar char="•"/>
+            </a:pPr>
+            <a:r>
+              <a:rPr lang="zh-TW" altLang="en-US" sz="3200" dirty="0">
+                <a:latin typeface="微軟正黑體" panose="020B0604030504040204" pitchFamily="34" charset="-120"/>
+                <a:ea typeface="微軟正黑體" panose="020B0604030504040204" pitchFamily="34" charset="-120"/>
+              </a:rPr>
+              <a:t>模型頭</a:t>
+            </a:r>
+            <a:endParaRPr lang="en-US" altLang="zh-TW" sz="3200" dirty="0">
+              <a:latin typeface="微軟正黑體" panose="020B0604030504040204" pitchFamily="34" charset="-120"/>
+              <a:ea typeface="微軟正黑體" panose="020B0604030504040204" pitchFamily="34" charset="-120"/>
+            </a:endParaRPr>
+          </a:p>
+          <a:p>
+            <a:pPr marL="514350" indent="-514350">
+              <a:buFont typeface="Arial" panose="020B0604020202020204" pitchFamily="34" charset="0"/>
+              <a:buChar char="•"/>
+            </a:pPr>
+            <a:r>
+              <a:rPr lang="zh-TW" altLang="en-US" sz="3200" dirty="0">
+                <a:latin typeface="微軟正黑體" panose="020B0604030504040204" pitchFamily="34" charset="-120"/>
+                <a:ea typeface="微軟正黑體" panose="020B0604030504040204" pitchFamily="34" charset="-120"/>
+              </a:rPr>
+              <a:t>模型頭之後的處理</a:t>
             </a:r>
             <a:endParaRPr lang="en-US" altLang="zh-TW" sz="3200" dirty="0">
               <a:latin typeface="微軟正黑體" panose="020B0604030504040204" pitchFamily="34" charset="-120"/>
@@ -15063,6 +15539,29 @@
               <a:tabLst/>
               <a:defRPr/>
             </a:pPr>
+            <a:r>
+              <a:rPr kumimoji="0" lang="en-US" altLang="zh-TW" sz="4800" b="1" i="0" u="none" strike="noStrike" kern="0" cap="none" spc="0" normalizeH="0" baseline="0" noProof="0" dirty="0">
+                <a:ln>
+                  <a:noFill/>
+                </a:ln>
+                <a:solidFill>
+                  <a:srgbClr val="00B0F0"/>
+                </a:solidFill>
+                <a:effectLst>
+                  <a:outerShdw blurRad="38100" dist="38100" dir="2700000" algn="tl">
+                    <a:srgbClr val="000000">
+                      <a:alpha val="43137"/>
+                    </a:srgbClr>
+                  </a:outerShdw>
+                </a:effectLst>
+                <a:uLnTx/>
+                <a:uFillTx/>
+                <a:latin typeface="微軟正黑體" panose="020B0604030504040204" pitchFamily="34" charset="-120"/>
+                <a:ea typeface="微軟正黑體" panose="020B0604030504040204" pitchFamily="34" charset="-120"/>
+                <a:cs typeface="+mn-cs"/>
+              </a:rPr>
+              <a:t>7. NLP</a:t>
+            </a:r>
             <a:r>
               <a:rPr kumimoji="0" lang="zh-TW" altLang="en-US" sz="4800" b="1" i="0" u="none" strike="noStrike" kern="0" cap="none" spc="0" normalizeH="0" baseline="0" noProof="0" dirty="0">
                 <a:ln>
@@ -15084,7 +15583,7 @@
                 <a:ea typeface="微軟正黑體" panose="020B0604030504040204" pitchFamily="34" charset="-120"/>
                 <a:cs typeface="+mn-cs"/>
               </a:rPr>
-              <a:t>下載模型</a:t>
+              <a:t>任務的內部結構</a:t>
             </a:r>
           </a:p>
         </p:txBody>
@@ -15092,7 +15591,7 @@
     </p:spTree>
     <p:extLst>
       <p:ext uri="{BB962C8B-B14F-4D97-AF65-F5344CB8AC3E}">
-        <p14:creationId xmlns:p14="http://schemas.microsoft.com/office/powerpoint/2010/main" val="513060761"/>
+        <p14:creationId xmlns:p14="http://schemas.microsoft.com/office/powerpoint/2010/main" val="1420312926"/>
       </p:ext>
     </p:extLst>
   </p:cSld>
@@ -15105,7 +15604,7 @@
 </p:sld>
 </file>
 
-<file path=ppt/slides/slide19.xml><?xml version="1.0" encoding="utf-8"?>
+<file path=ppt/slides/slide20.xml><?xml version="1.0" encoding="utf-8"?>
 <p:sld xmlns:a="http://schemas.openxmlformats.org/drawingml/2006/main" xmlns:r="http://schemas.openxmlformats.org/officeDocument/2006/relationships" xmlns:p="http://schemas.openxmlformats.org/presentationml/2006/main">
   <p:cSld>
     <p:spTree>
@@ -15131,7 +15630,7 @@
         <p:spPr>
           <a:xfrm>
             <a:off x="685800" y="1828800"/>
-            <a:ext cx="8077200" cy="3539430"/>
+            <a:ext cx="8077200" cy="4524315"/>
           </a:xfrm>
           <a:prstGeom prst="rect">
             <a:avLst/>
@@ -15153,29 +15652,40 @@
                 <a:latin typeface="微軟正黑體" panose="020B0604030504040204" pitchFamily="34" charset="-120"/>
                 <a:ea typeface="微軟正黑體" panose="020B0604030504040204" pitchFamily="34" charset="-120"/>
               </a:rPr>
-              <a:t>給定一些輸入，輸出內容隱藏狀態（雖然這些隱藏狀態本身可能很有用，但它們通常是模型另一部分（稱為頭部</a:t>
+              <a:t>給定一些輸入，輸出內容隱藏狀態（</a:t>
             </a:r>
             <a:r>
               <a:rPr lang="en-US" altLang="zh-TW" sz="3200" dirty="0">
                 <a:latin typeface="微軟正黑體" panose="020B0604030504040204" pitchFamily="34" charset="-120"/>
                 <a:ea typeface="微軟正黑體" panose="020B0604030504040204" pitchFamily="34" charset="-120"/>
               </a:rPr>
-              <a:t>(head)</a:t>
+              <a:t>hidden states</a:t>
             </a:r>
             <a:r>
               <a:rPr lang="zh-TW" altLang="en-US" sz="3200" dirty="0">
                 <a:latin typeface="微軟正黑體" panose="020B0604030504040204" pitchFamily="34" charset="-120"/>
                 <a:ea typeface="微軟正黑體" panose="020B0604030504040204" pitchFamily="34" charset="-120"/>
               </a:rPr>
-              <a:t>）的輸入</a:t>
+              <a:t>）亦稱特徵（</a:t>
             </a:r>
             <a:r>
               <a:rPr lang="en-US" altLang="zh-TW" sz="3200" dirty="0">
                 <a:latin typeface="微軟正黑體" panose="020B0604030504040204" pitchFamily="34" charset="-120"/>
                 <a:ea typeface="微軟正黑體" panose="020B0604030504040204" pitchFamily="34" charset="-120"/>
               </a:rPr>
-              <a:t> </a:t>
-            </a:r>
+              <a:t>features</a:t>
+            </a:r>
+            <a:r>
+              <a:rPr lang="zh-TW" altLang="en-US" sz="3200" dirty="0">
+                <a:latin typeface="微軟正黑體" panose="020B0604030504040204" pitchFamily="34" charset="-120"/>
+                <a:ea typeface="微軟正黑體" panose="020B0604030504040204" pitchFamily="34" charset="-120"/>
+              </a:rPr>
+              <a:t>）</a:t>
+            </a:r>
+            <a:endParaRPr lang="en-US" altLang="zh-TW" sz="3200" dirty="0">
+              <a:latin typeface="微軟正黑體" panose="020B0604030504040204" pitchFamily="34" charset="-120"/>
+              <a:ea typeface="微軟正黑體" panose="020B0604030504040204" pitchFamily="34" charset="-120"/>
+            </a:endParaRPr>
           </a:p>
           <a:p>
             <a:pPr marL="514350" indent="-514350">
@@ -15187,7 +15697,72 @@
                 <a:latin typeface="微軟正黑體" panose="020B0604030504040204" pitchFamily="34" charset="-120"/>
                 <a:ea typeface="微軟正黑體" panose="020B0604030504040204" pitchFamily="34" charset="-120"/>
               </a:rPr>
-              <a:t>以使用相同的體系結構執行不同的任務，但這些任務中的每個任務都有一個與之關聯的不同頭</a:t>
+              <a:t>對於每個模型輸入，獲得一組高維向量，表示</a:t>
+            </a:r>
+            <a:r>
+              <a:rPr lang="en-US" altLang="zh-TW" sz="3200" dirty="0">
+                <a:latin typeface="微軟正黑體" panose="020B0604030504040204" pitchFamily="34" charset="-120"/>
+                <a:ea typeface="微軟正黑體" panose="020B0604030504040204" pitchFamily="34" charset="-120"/>
+              </a:rPr>
+              <a:t>Transformer</a:t>
+            </a:r>
+            <a:r>
+              <a:rPr lang="zh-TW" altLang="en-US" sz="3200" dirty="0">
+                <a:latin typeface="微軟正黑體" panose="020B0604030504040204" pitchFamily="34" charset="-120"/>
+                <a:ea typeface="微軟正黑體" panose="020B0604030504040204" pitchFamily="34" charset="-120"/>
+              </a:rPr>
+              <a:t>模型對該輸入的上下文理解</a:t>
+            </a:r>
+            <a:endParaRPr lang="en-US" altLang="zh-TW" sz="3200" dirty="0">
+              <a:latin typeface="微軟正黑體" panose="020B0604030504040204" pitchFamily="34" charset="-120"/>
+              <a:ea typeface="微軟正黑體" panose="020B0604030504040204" pitchFamily="34" charset="-120"/>
+            </a:endParaRPr>
+          </a:p>
+          <a:p>
+            <a:pPr marL="514350" indent="-514350">
+              <a:buFont typeface="Arial" panose="020B0604020202020204" pitchFamily="34" charset="0"/>
+              <a:buChar char="•"/>
+            </a:pPr>
+            <a:r>
+              <a:rPr lang="zh-TW" altLang="en-US" sz="3200" dirty="0">
+                <a:latin typeface="微軟正黑體" panose="020B0604030504040204" pitchFamily="34" charset="-120"/>
+                <a:ea typeface="微軟正黑體" panose="020B0604030504040204" pitchFamily="34" charset="-120"/>
+              </a:rPr>
+              <a:t>由於同一個模型訓練的超參數、輪數，時間、批次數、效能表現都不同，因此每次訓練時都會存一次，稱為</a:t>
+            </a:r>
+            <a:r>
+              <a:rPr lang="en-US" altLang="zh-TW" sz="3200" dirty="0">
+                <a:latin typeface="微軟正黑體" panose="020B0604030504040204" pitchFamily="34" charset="-120"/>
+                <a:ea typeface="微軟正黑體" panose="020B0604030504040204" pitchFamily="34" charset="-120"/>
+              </a:rPr>
+              <a:t>checkpoint</a:t>
+            </a:r>
+          </a:p>
+          <a:p>
+            <a:pPr marL="514350" indent="-514350">
+              <a:buFont typeface="Arial" panose="020B0604020202020204" pitchFamily="34" charset="0"/>
+              <a:buChar char="•"/>
+            </a:pPr>
+            <a:r>
+              <a:rPr lang="zh-TW" altLang="en-US" sz="3200" dirty="0">
+                <a:latin typeface="微軟正黑體" panose="020B0604030504040204" pitchFamily="34" charset="-120"/>
+                <a:ea typeface="微軟正黑體" panose="020B0604030504040204" pitchFamily="34" charset="-120"/>
+              </a:rPr>
+              <a:t>下載某一個</a:t>
+            </a:r>
+            <a:r>
+              <a:rPr lang="en-US" altLang="zh-TW" sz="3200" dirty="0">
+                <a:latin typeface="微軟正黑體" panose="020B0604030504040204" pitchFamily="34" charset="-120"/>
+                <a:ea typeface="微軟正黑體" panose="020B0604030504040204" pitchFamily="34" charset="-120"/>
+              </a:rPr>
+              <a:t>checkpoint</a:t>
+            </a:r>
+            <a:r>
+              <a:rPr lang="zh-TW" altLang="en-US" sz="3200" dirty="0">
+                <a:latin typeface="微軟正黑體" panose="020B0604030504040204" pitchFamily="34" charset="-120"/>
+                <a:ea typeface="微軟正黑體" panose="020B0604030504040204" pitchFamily="34" charset="-120"/>
+              </a:rPr>
+              <a:t>來作為模型本身</a:t>
             </a:r>
             <a:endParaRPr lang="en-US" altLang="zh-TW" sz="3200" dirty="0">
               <a:latin typeface="微軟正黑體" panose="020B0604030504040204" pitchFamily="34" charset="-120"/>
@@ -15257,6 +15832,179 @@
                 <a:ea typeface="微軟正黑體" panose="020B0604030504040204" pitchFamily="34" charset="-120"/>
                 <a:cs typeface="+mn-cs"/>
               </a:rPr>
+              <a:t>下載模型</a:t>
+            </a:r>
+          </a:p>
+        </p:txBody>
+      </p:sp>
+    </p:spTree>
+    <p:extLst>
+      <p:ext uri="{BB962C8B-B14F-4D97-AF65-F5344CB8AC3E}">
+        <p14:creationId xmlns:p14="http://schemas.microsoft.com/office/powerpoint/2010/main" val="513060761"/>
+      </p:ext>
+    </p:extLst>
+  </p:cSld>
+  <p:clrMapOvr>
+    <a:masterClrMapping/>
+  </p:clrMapOvr>
+  <p:transition>
+    <p:fade/>
+  </p:transition>
+</p:sld>
+</file>
+
+<file path=ppt/slides/slide21.xml><?xml version="1.0" encoding="utf-8"?>
+<p:sld xmlns:a="http://schemas.openxmlformats.org/drawingml/2006/main" xmlns:r="http://schemas.openxmlformats.org/officeDocument/2006/relationships" xmlns:p="http://schemas.openxmlformats.org/presentationml/2006/main">
+  <p:cSld>
+    <p:spTree>
+      <p:nvGrpSpPr>
+        <p:cNvPr id="1" name=""/>
+        <p:cNvGrpSpPr/>
+        <p:nvPr/>
+      </p:nvGrpSpPr>
+      <p:grpSpPr>
+        <a:xfrm>
+          <a:off x="0" y="0"/>
+          <a:ext cx="0" cy="0"/>
+          <a:chOff x="0" y="0"/>
+          <a:chExt cx="0" cy="0"/>
+        </a:xfrm>
+      </p:grpSpPr>
+      <p:sp>
+        <p:nvSpPr>
+          <p:cNvPr id="5" name="文字方塊 4"/>
+          <p:cNvSpPr txBox="1"/>
+          <p:nvPr/>
+        </p:nvSpPr>
+        <p:spPr>
+          <a:xfrm>
+            <a:off x="685800" y="1828800"/>
+            <a:ext cx="8077200" cy="3539430"/>
+          </a:xfrm>
+          <a:prstGeom prst="rect">
+            <a:avLst/>
+          </a:prstGeom>
+          <a:noFill/>
+        </p:spPr>
+        <p:txBody>
+          <a:bodyPr wrap="square" rtlCol="0">
+            <a:spAutoFit/>
+          </a:bodyPr>
+          <a:lstStyle/>
+          <a:p>
+            <a:pPr marL="514350" indent="-514350">
+              <a:buFont typeface="Arial" panose="020B0604020202020204" pitchFamily="34" charset="0"/>
+              <a:buChar char="•"/>
+            </a:pPr>
+            <a:r>
+              <a:rPr lang="zh-TW" altLang="en-US" sz="3200" dirty="0">
+                <a:latin typeface="微軟正黑體" panose="020B0604030504040204" pitchFamily="34" charset="-120"/>
+                <a:ea typeface="微軟正黑體" panose="020B0604030504040204" pitchFamily="34" charset="-120"/>
+              </a:rPr>
+              <a:t>給定一些輸入，輸出內容隱藏狀態（雖然這些隱藏狀態本身可能很有用，但它們通常是模型另一部分（稱為頭部</a:t>
+            </a:r>
+            <a:r>
+              <a:rPr lang="en-US" altLang="zh-TW" sz="3200" dirty="0">
+                <a:latin typeface="微軟正黑體" panose="020B0604030504040204" pitchFamily="34" charset="-120"/>
+                <a:ea typeface="微軟正黑體" panose="020B0604030504040204" pitchFamily="34" charset="-120"/>
+              </a:rPr>
+              <a:t>(head)</a:t>
+            </a:r>
+            <a:r>
+              <a:rPr lang="zh-TW" altLang="en-US" sz="3200" dirty="0">
+                <a:latin typeface="微軟正黑體" panose="020B0604030504040204" pitchFamily="34" charset="-120"/>
+                <a:ea typeface="微軟正黑體" panose="020B0604030504040204" pitchFamily="34" charset="-120"/>
+              </a:rPr>
+              <a:t>）的輸入</a:t>
+            </a:r>
+            <a:r>
+              <a:rPr lang="en-US" altLang="zh-TW" sz="3200" dirty="0">
+                <a:latin typeface="微軟正黑體" panose="020B0604030504040204" pitchFamily="34" charset="-120"/>
+                <a:ea typeface="微軟正黑體" panose="020B0604030504040204" pitchFamily="34" charset="-120"/>
+              </a:rPr>
+              <a:t> </a:t>
+            </a:r>
+          </a:p>
+          <a:p>
+            <a:pPr marL="514350" indent="-514350">
+              <a:buFont typeface="Arial" panose="020B0604020202020204" pitchFamily="34" charset="0"/>
+              <a:buChar char="•"/>
+            </a:pPr>
+            <a:r>
+              <a:rPr lang="zh-TW" altLang="en-US" sz="3200" dirty="0">
+                <a:latin typeface="微軟正黑體" panose="020B0604030504040204" pitchFamily="34" charset="-120"/>
+                <a:ea typeface="微軟正黑體" panose="020B0604030504040204" pitchFamily="34" charset="-120"/>
+              </a:rPr>
+              <a:t>以使用相同的體系結構執行不同的任務，但這些任務中的每個任務都有一個與之關聯的不同頭</a:t>
+            </a:r>
+            <a:endParaRPr lang="en-US" altLang="zh-TW" sz="3200" dirty="0">
+              <a:latin typeface="微軟正黑體" panose="020B0604030504040204" pitchFamily="34" charset="-120"/>
+              <a:ea typeface="微軟正黑體" panose="020B0604030504040204" pitchFamily="34" charset="-120"/>
+            </a:endParaRPr>
+          </a:p>
+        </p:txBody>
+      </p:sp>
+      <p:sp>
+        <p:nvSpPr>
+          <p:cNvPr id="4" name="文字版面配置區 2"/>
+          <p:cNvSpPr txBox="1">
+            <a:spLocks/>
+          </p:cNvSpPr>
+          <p:nvPr/>
+        </p:nvSpPr>
+        <p:spPr>
+          <a:xfrm>
+            <a:off x="1295400" y="304800"/>
+            <a:ext cx="6477000" cy="990600"/>
+          </a:xfrm>
+          <a:prstGeom prst="rect">
+            <a:avLst/>
+          </a:prstGeom>
+        </p:spPr>
+        <p:txBody>
+          <a:bodyPr tIns="91440" bIns="91440" anchor="b" anchorCtr="0">
+            <a:noAutofit/>
+          </a:bodyPr>
+          <a:lstStyle/>
+          <a:p>
+            <a:pPr marL="0" marR="0" lvl="0" indent="0" algn="just" defTabSz="914400" rtl="0" eaLnBrk="1" fontAlgn="auto" latinLnBrk="0" hangingPunct="1">
+              <a:lnSpc>
+                <a:spcPct val="100000"/>
+              </a:lnSpc>
+              <a:spcBef>
+                <a:spcPct val="20000"/>
+              </a:spcBef>
+              <a:spcAft>
+                <a:spcPts val="0"/>
+              </a:spcAft>
+              <a:buClrTx/>
+              <a:buSzTx/>
+              <a:buFontTx/>
+              <a:buNone/>
+              <a:tabLst/>
+              <a:defRPr/>
+            </a:pPr>
+            <a:r>
+              <a:rPr kumimoji="0" lang="zh-TW" altLang="en-US" sz="4800" b="1" i="0" u="none" strike="noStrike" kern="0" cap="none" spc="0" normalizeH="0" baseline="0" noProof="0" dirty="0">
+                <a:ln>
+                  <a:noFill/>
+                </a:ln>
+                <a:solidFill>
+                  <a:srgbClr val="00B0F0"/>
+                </a:solidFill>
+                <a:effectLst>
+                  <a:outerShdw blurRad="38100" dist="38100" dir="2700000" algn="tl">
+                    <a:srgbClr val="000000">
+                      <a:alpha val="43137"/>
+                    </a:srgbClr>
+                  </a:outerShdw>
+                </a:effectLst>
+                <a:uLnTx/>
+                <a:uFillTx/>
+                <a:latin typeface="微軟正黑體" panose="020B0604030504040204" pitchFamily="34" charset="-120"/>
+                <a:ea typeface="微軟正黑體" panose="020B0604030504040204" pitchFamily="34" charset="-120"/>
+                <a:cs typeface="+mn-cs"/>
+              </a:rPr>
               <a:t>使用</a:t>
             </a:r>
             <a:r>
@@ -15324,273 +16072,7 @@
 </p:sld>
 </file>
 
-<file path=ppt/slides/slide2.xml><?xml version="1.0" encoding="utf-8"?>
-<p:sld xmlns:a="http://schemas.openxmlformats.org/drawingml/2006/main" xmlns:r="http://schemas.openxmlformats.org/officeDocument/2006/relationships" xmlns:p="http://schemas.openxmlformats.org/presentationml/2006/main">
-  <p:cSld>
-    <p:spTree>
-      <p:nvGrpSpPr>
-        <p:cNvPr id="1" name=""/>
-        <p:cNvGrpSpPr/>
-        <p:nvPr/>
-      </p:nvGrpSpPr>
-      <p:grpSpPr>
-        <a:xfrm>
-          <a:off x="0" y="0"/>
-          <a:ext cx="0" cy="0"/>
-          <a:chOff x="0" y="0"/>
-          <a:chExt cx="0" cy="0"/>
-        </a:xfrm>
-      </p:grpSpPr>
-      <p:sp>
-        <p:nvSpPr>
-          <p:cNvPr id="5" name="文字方塊 4"/>
-          <p:cNvSpPr txBox="1"/>
-          <p:nvPr/>
-        </p:nvSpPr>
-        <p:spPr>
-          <a:xfrm>
-            <a:off x="685800" y="1828800"/>
-            <a:ext cx="8077200" cy="3539430"/>
-          </a:xfrm>
-          <a:prstGeom prst="rect">
-            <a:avLst/>
-          </a:prstGeom>
-          <a:noFill/>
-        </p:spPr>
-        <p:txBody>
-          <a:bodyPr wrap="square" rtlCol="0">
-            <a:spAutoFit/>
-          </a:bodyPr>
-          <a:lstStyle/>
-          <a:p>
-            <a:pPr marL="514350" indent="-514350">
-              <a:buFont typeface="Arial" panose="020B0604020202020204" pitchFamily="34" charset="0"/>
-              <a:buChar char="•"/>
-            </a:pPr>
-            <a:r>
-              <a:rPr lang="en-US" altLang="zh-TW" sz="3200" dirty="0">
-                <a:latin typeface="微軟正黑體" panose="020B0604030504040204" pitchFamily="34" charset="-120"/>
-                <a:ea typeface="微軟正黑體" panose="020B0604030504040204" pitchFamily="34" charset="-120"/>
-              </a:rPr>
-              <a:t>end-to-end pipeline</a:t>
-            </a:r>
-          </a:p>
-          <a:p>
-            <a:pPr marL="514350" indent="-514350">
-              <a:buFont typeface="Arial" panose="020B0604020202020204" pitchFamily="34" charset="0"/>
-              <a:buChar char="•"/>
-            </a:pPr>
-            <a:r>
-              <a:rPr lang="zh-TW" altLang="en-US" sz="3200" dirty="0">
-                <a:latin typeface="微軟正黑體" panose="020B0604030504040204" pitchFamily="34" charset="-120"/>
-                <a:ea typeface="微軟正黑體" panose="020B0604030504040204" pitchFamily="34" charset="-120"/>
-              </a:rPr>
-              <a:t>資料集</a:t>
-            </a:r>
-            <a:r>
-              <a:rPr lang="en-US" altLang="zh-TW" sz="3200" dirty="0">
-                <a:latin typeface="微軟正黑體" panose="020B0604030504040204" pitchFamily="34" charset="-120"/>
-                <a:ea typeface="微軟正黑體" panose="020B0604030504040204" pitchFamily="34" charset="-120"/>
-              </a:rPr>
-              <a:t>dataset</a:t>
-            </a:r>
-          </a:p>
-          <a:p>
-            <a:pPr marL="514350" indent="-514350">
-              <a:buFont typeface="Arial" panose="020B0604020202020204" pitchFamily="34" charset="0"/>
-              <a:buChar char="•"/>
-            </a:pPr>
-            <a:r>
-              <a:rPr lang="zh-TW" altLang="en-US" sz="3200" dirty="0">
-                <a:latin typeface="微軟正黑體" panose="020B0604030504040204" pitchFamily="34" charset="-120"/>
-                <a:ea typeface="微軟正黑體" panose="020B0604030504040204" pitchFamily="34" charset="-120"/>
-              </a:rPr>
-              <a:t>分詞預處理</a:t>
-            </a:r>
-            <a:endParaRPr lang="en-US" altLang="zh-TW" sz="3200" dirty="0">
-              <a:latin typeface="微軟正黑體" panose="020B0604030504040204" pitchFamily="34" charset="-120"/>
-              <a:ea typeface="微軟正黑體" panose="020B0604030504040204" pitchFamily="34" charset="-120"/>
-            </a:endParaRPr>
-          </a:p>
-          <a:p>
-            <a:pPr marL="514350" indent="-514350">
-              <a:buFont typeface="Arial" panose="020B0604020202020204" pitchFamily="34" charset="0"/>
-              <a:buChar char="•"/>
-            </a:pPr>
-            <a:r>
-              <a:rPr lang="zh-TW" altLang="en-US" sz="3200" dirty="0">
-                <a:latin typeface="微軟正黑體" panose="020B0604030504040204" pitchFamily="34" charset="-120"/>
-                <a:ea typeface="微軟正黑體" panose="020B0604030504040204" pitchFamily="34" charset="-120"/>
-              </a:rPr>
-              <a:t>模型</a:t>
-            </a:r>
-            <a:r>
-              <a:rPr lang="en-US" altLang="zh-TW" sz="3200" dirty="0">
-                <a:latin typeface="微軟正黑體" panose="020B0604030504040204" pitchFamily="34" charset="-120"/>
-                <a:ea typeface="微軟正黑體" panose="020B0604030504040204" pitchFamily="34" charset="-120"/>
-              </a:rPr>
-              <a:t>model</a:t>
-            </a:r>
-          </a:p>
-          <a:p>
-            <a:pPr marL="514350" indent="-514350">
-              <a:buFont typeface="Arial" panose="020B0604020202020204" pitchFamily="34" charset="0"/>
-              <a:buChar char="•"/>
-            </a:pPr>
-            <a:r>
-              <a:rPr lang="zh-TW" altLang="en-US" sz="3200" dirty="0">
-                <a:latin typeface="微軟正黑體" panose="020B0604030504040204" pitchFamily="34" charset="-120"/>
-                <a:ea typeface="微軟正黑體" panose="020B0604030504040204" pitchFamily="34" charset="-120"/>
-              </a:rPr>
-              <a:t>高維向量</a:t>
-            </a:r>
-            <a:endParaRPr lang="en-US" altLang="zh-TW" sz="3200" dirty="0">
-              <a:latin typeface="微軟正黑體" panose="020B0604030504040204" pitchFamily="34" charset="-120"/>
-              <a:ea typeface="微軟正黑體" panose="020B0604030504040204" pitchFamily="34" charset="-120"/>
-            </a:endParaRPr>
-          </a:p>
-          <a:p>
-            <a:pPr marL="514350" indent="-514350">
-              <a:buFont typeface="Arial" panose="020B0604020202020204" pitchFamily="34" charset="0"/>
-              <a:buChar char="•"/>
-            </a:pPr>
-            <a:r>
-              <a:rPr lang="zh-TW" altLang="en-US" sz="3200" dirty="0">
-                <a:latin typeface="微軟正黑體" panose="020B0604030504040204" pitchFamily="34" charset="-120"/>
-                <a:ea typeface="微軟正黑體" panose="020B0604030504040204" pitchFamily="34" charset="-120"/>
-              </a:rPr>
-              <a:t>模型頭</a:t>
-            </a:r>
-            <a:endParaRPr lang="en-US" altLang="zh-TW" sz="3200" dirty="0">
-              <a:latin typeface="微軟正黑體" panose="020B0604030504040204" pitchFamily="34" charset="-120"/>
-              <a:ea typeface="微軟正黑體" panose="020B0604030504040204" pitchFamily="34" charset="-120"/>
-            </a:endParaRPr>
-          </a:p>
-          <a:p>
-            <a:pPr marL="514350" indent="-514350">
-              <a:buFont typeface="Arial" panose="020B0604020202020204" pitchFamily="34" charset="0"/>
-              <a:buChar char="•"/>
-            </a:pPr>
-            <a:r>
-              <a:rPr lang="zh-TW" altLang="en-US" sz="3200" dirty="0">
-                <a:latin typeface="微軟正黑體" panose="020B0604030504040204" pitchFamily="34" charset="-120"/>
-                <a:ea typeface="微軟正黑體" panose="020B0604030504040204" pitchFamily="34" charset="-120"/>
-              </a:rPr>
-              <a:t>模型頭之後的處理</a:t>
-            </a:r>
-            <a:endParaRPr lang="en-US" altLang="zh-TW" sz="3200" dirty="0">
-              <a:latin typeface="微軟正黑體" panose="020B0604030504040204" pitchFamily="34" charset="-120"/>
-              <a:ea typeface="微軟正黑體" panose="020B0604030504040204" pitchFamily="34" charset="-120"/>
-            </a:endParaRPr>
-          </a:p>
-        </p:txBody>
-      </p:sp>
-      <p:sp>
-        <p:nvSpPr>
-          <p:cNvPr id="4" name="文字版面配置區 2"/>
-          <p:cNvSpPr txBox="1">
-            <a:spLocks/>
-          </p:cNvSpPr>
-          <p:nvPr/>
-        </p:nvSpPr>
-        <p:spPr>
-          <a:xfrm>
-            <a:off x="1295400" y="304800"/>
-            <a:ext cx="6477000" cy="990600"/>
-          </a:xfrm>
-          <a:prstGeom prst="rect">
-            <a:avLst/>
-          </a:prstGeom>
-        </p:spPr>
-        <p:txBody>
-          <a:bodyPr tIns="91440" bIns="91440" anchor="b" anchorCtr="0">
-            <a:noAutofit/>
-          </a:bodyPr>
-          <a:lstStyle/>
-          <a:p>
-            <a:pPr marL="0" marR="0" lvl="0" indent="0" algn="just" defTabSz="914400" rtl="0" eaLnBrk="1" fontAlgn="auto" latinLnBrk="0" hangingPunct="1">
-              <a:lnSpc>
-                <a:spcPct val="100000"/>
-              </a:lnSpc>
-              <a:spcBef>
-                <a:spcPct val="20000"/>
-              </a:spcBef>
-              <a:spcAft>
-                <a:spcPts val="0"/>
-              </a:spcAft>
-              <a:buClrTx/>
-              <a:buSzTx/>
-              <a:buFontTx/>
-              <a:buNone/>
-              <a:tabLst/>
-              <a:defRPr/>
-            </a:pPr>
-            <a:r>
-              <a:rPr kumimoji="0" lang="en-US" altLang="zh-TW" sz="4800" b="1" i="0" u="none" strike="noStrike" kern="0" cap="none" spc="0" normalizeH="0" baseline="0" noProof="0" dirty="0">
-                <a:ln>
-                  <a:noFill/>
-                </a:ln>
-                <a:solidFill>
-                  <a:srgbClr val="00B0F0"/>
-                </a:solidFill>
-                <a:effectLst>
-                  <a:outerShdw blurRad="38100" dist="38100" dir="2700000" algn="tl">
-                    <a:srgbClr val="000000">
-                      <a:alpha val="43137"/>
-                    </a:srgbClr>
-                  </a:outerShdw>
-                </a:effectLst>
-                <a:uLnTx/>
-                <a:uFillTx/>
-                <a:latin typeface="微軟正黑體" panose="020B0604030504040204" pitchFamily="34" charset="-120"/>
-                <a:ea typeface="微軟正黑體" panose="020B0604030504040204" pitchFamily="34" charset="-120"/>
-                <a:cs typeface="+mn-cs"/>
-              </a:rPr>
-              <a:t>7. NLP</a:t>
-            </a:r>
-            <a:r>
-              <a:rPr kumimoji="0" lang="zh-TW" altLang="en-US" sz="4800" b="1" i="0" u="none" strike="noStrike" kern="0" cap="none" spc="0" normalizeH="0" baseline="0" noProof="0" dirty="0">
-                <a:ln>
-                  <a:noFill/>
-                </a:ln>
-                <a:solidFill>
-                  <a:srgbClr val="00B0F0"/>
-                </a:solidFill>
-                <a:effectLst>
-                  <a:outerShdw blurRad="38100" dist="38100" dir="2700000" algn="tl">
-                    <a:srgbClr val="000000">
-                      <a:alpha val="43137"/>
-                    </a:srgbClr>
-                  </a:outerShdw>
-                </a:effectLst>
-                <a:uLnTx/>
-                <a:uFillTx/>
-                <a:latin typeface="微軟正黑體" panose="020B0604030504040204" pitchFamily="34" charset="-120"/>
-                <a:ea typeface="微軟正黑體" panose="020B0604030504040204" pitchFamily="34" charset="-120"/>
-                <a:cs typeface="+mn-cs"/>
-              </a:rPr>
-              <a:t>任務的內部結構</a:t>
-            </a:r>
-          </a:p>
-        </p:txBody>
-      </p:sp>
-    </p:spTree>
-    <p:extLst>
-      <p:ext uri="{BB962C8B-B14F-4D97-AF65-F5344CB8AC3E}">
-        <p14:creationId xmlns:p14="http://schemas.microsoft.com/office/powerpoint/2010/main" val="1420312926"/>
-      </p:ext>
-    </p:extLst>
-  </p:cSld>
-  <p:clrMapOvr>
-    <a:masterClrMapping/>
-  </p:clrMapOvr>
-  <p:transition>
-    <p:fade/>
-  </p:transition>
-</p:sld>
-</file>
-
-<file path=ppt/slides/slide20.xml><?xml version="1.0" encoding="utf-8"?>
+<file path=ppt/slides/slide22.xml><?xml version="1.0" encoding="utf-8"?>
 <p:sld xmlns:a="http://schemas.openxmlformats.org/drawingml/2006/main" xmlns:r="http://schemas.openxmlformats.org/officeDocument/2006/relationships" xmlns:p="http://schemas.openxmlformats.org/presentationml/2006/main">
   <p:cSld>
     <p:spTree>
@@ -15868,7 +16350,7 @@
 </p:sld>
 </file>
 
-<file path=ppt/slides/slide21.xml><?xml version="1.0" encoding="utf-8"?>
+<file path=ppt/slides/slide23.xml><?xml version="1.0" encoding="utf-8"?>
 <p:sld xmlns:a="http://schemas.openxmlformats.org/drawingml/2006/main" xmlns:r="http://schemas.openxmlformats.org/officeDocument/2006/relationships" xmlns:p="http://schemas.openxmlformats.org/presentationml/2006/main">
   <p:cSld>
     <p:spTree>
@@ -16083,7 +16565,7 @@
 </p:sld>
 </file>
 
-<file path=ppt/slides/slide22.xml><?xml version="1.0" encoding="utf-8"?>
+<file path=ppt/slides/slide24.xml><?xml version="1.0" encoding="utf-8"?>
 <p:sld xmlns:a="http://schemas.openxmlformats.org/drawingml/2006/main" xmlns:r="http://schemas.openxmlformats.org/officeDocument/2006/relationships" xmlns:p="http://schemas.openxmlformats.org/presentationml/2006/main">
   <p:cSld>
     <p:spTree>
@@ -16146,7 +16628,7 @@
 </p:sld>
 </file>
 
-<file path=ppt/slides/slide23.xml><?xml version="1.0" encoding="utf-8"?>
+<file path=ppt/slides/slide25.xml><?xml version="1.0" encoding="utf-8"?>
 <p:sld xmlns:a="http://schemas.openxmlformats.org/drawingml/2006/main" xmlns:r="http://schemas.openxmlformats.org/officeDocument/2006/relationships" xmlns:p="http://schemas.openxmlformats.org/presentationml/2006/main">
   <p:cSld>
     <p:spTree>
@@ -16209,7 +16691,7 @@
 </p:sld>
 </file>
 
-<file path=ppt/slides/slide24.xml><?xml version="1.0" encoding="utf-8"?>
+<file path=ppt/slides/slide26.xml><?xml version="1.0" encoding="utf-8"?>
 <p:sld xmlns:a="http://schemas.openxmlformats.org/drawingml/2006/main" xmlns:r="http://schemas.openxmlformats.org/officeDocument/2006/relationships" xmlns:p="http://schemas.openxmlformats.org/presentationml/2006/main">
   <p:cSld>
     <p:spTree>
@@ -16272,7 +16754,7 @@
 </p:sld>
 </file>
 
-<file path=ppt/slides/slide25.xml><?xml version="1.0" encoding="utf-8"?>
+<file path=ppt/slides/slide27.xml><?xml version="1.0" encoding="utf-8"?>
 <p:sld xmlns:a="http://schemas.openxmlformats.org/drawingml/2006/main" xmlns:r="http://schemas.openxmlformats.org/officeDocument/2006/relationships" xmlns:p="http://schemas.openxmlformats.org/presentationml/2006/main">
   <p:cSld>
     <p:spTree>
@@ -16335,7 +16817,7 @@
 </p:sld>
 </file>
 
-<file path=ppt/slides/slide26.xml><?xml version="1.0" encoding="utf-8"?>
+<file path=ppt/slides/slide28.xml><?xml version="1.0" encoding="utf-8"?>
 <p:sld xmlns:a="http://schemas.openxmlformats.org/drawingml/2006/main" xmlns:r="http://schemas.openxmlformats.org/officeDocument/2006/relationships" xmlns:p="http://schemas.openxmlformats.org/presentationml/2006/main">
   <p:cSld>
     <p:spTree>
@@ -16398,7 +16880,7 @@
 </p:sld>
 </file>
 
-<file path=ppt/slides/slide27.xml><?xml version="1.0" encoding="utf-8"?>
+<file path=ppt/slides/slide29.xml><?xml version="1.0" encoding="utf-8"?>
 <p:sld xmlns:a="http://schemas.openxmlformats.org/drawingml/2006/main" xmlns:r="http://schemas.openxmlformats.org/officeDocument/2006/relationships" xmlns:p="http://schemas.openxmlformats.org/presentationml/2006/main">
   <p:cSld>
     <p:spTree>
@@ -16461,7 +16943,136 @@
 </p:sld>
 </file>
 
-<file path=ppt/slides/slide28.xml><?xml version="1.0" encoding="utf-8"?>
+<file path=ppt/slides/slide3.xml><?xml version="1.0" encoding="utf-8"?>
+<p:sld xmlns:a="http://schemas.openxmlformats.org/drawingml/2006/main" xmlns:r="http://schemas.openxmlformats.org/officeDocument/2006/relationships" xmlns:p="http://schemas.openxmlformats.org/presentationml/2006/main">
+  <p:cSld>
+    <p:spTree>
+      <p:nvGrpSpPr>
+        <p:cNvPr id="1" name=""/>
+        <p:cNvGrpSpPr/>
+        <p:nvPr/>
+      </p:nvGrpSpPr>
+      <p:grpSpPr>
+        <a:xfrm>
+          <a:off x="0" y="0"/>
+          <a:ext cx="0" cy="0"/>
+          <a:chOff x="0" y="0"/>
+          <a:chExt cx="0" cy="0"/>
+        </a:xfrm>
+      </p:grpSpPr>
+      <p:sp>
+        <p:nvSpPr>
+          <p:cNvPr id="4" name="文字版面配置區 2"/>
+          <p:cNvSpPr txBox="1">
+            <a:spLocks/>
+          </p:cNvSpPr>
+          <p:nvPr/>
+        </p:nvSpPr>
+        <p:spPr>
+          <a:xfrm>
+            <a:off x="1295400" y="304800"/>
+            <a:ext cx="6477000" cy="990600"/>
+          </a:xfrm>
+          <a:prstGeom prst="rect">
+            <a:avLst/>
+          </a:prstGeom>
+        </p:spPr>
+        <p:txBody>
+          <a:bodyPr tIns="91440" bIns="91440" anchor="b" anchorCtr="0">
+            <a:noAutofit/>
+          </a:bodyPr>
+          <a:lstStyle/>
+          <a:p>
+            <a:pPr marL="0" marR="0" lvl="0" indent="0" algn="just" defTabSz="914400" rtl="0" eaLnBrk="1" fontAlgn="auto" latinLnBrk="0" hangingPunct="1">
+              <a:lnSpc>
+                <a:spcPct val="100000"/>
+              </a:lnSpc>
+              <a:spcBef>
+                <a:spcPct val="20000"/>
+              </a:spcBef>
+              <a:spcAft>
+                <a:spcPts val="0"/>
+              </a:spcAft>
+              <a:buClrTx/>
+              <a:buSzTx/>
+              <a:buFontTx/>
+              <a:buNone/>
+              <a:tabLst/>
+              <a:defRPr/>
+            </a:pPr>
+            <a:r>
+              <a:rPr kumimoji="0" lang="en-US" altLang="zh-TW" sz="4800" b="1" i="0" u="none" strike="noStrike" kern="0" cap="none" spc="0" normalizeH="0" baseline="0" noProof="0" dirty="0">
+                <a:ln>
+                  <a:noFill/>
+                </a:ln>
+                <a:solidFill>
+                  <a:srgbClr val="00B0F0"/>
+                </a:solidFill>
+                <a:effectLst>
+                  <a:outerShdw blurRad="38100" dist="38100" dir="2700000" algn="tl">
+                    <a:srgbClr val="000000">
+                      <a:alpha val="43137"/>
+                    </a:srgbClr>
+                  </a:outerShdw>
+                </a:effectLst>
+                <a:uLnTx/>
+                <a:uFillTx/>
+                <a:latin typeface="微軟正黑體" panose="020B0604030504040204" pitchFamily="34" charset="-120"/>
+                <a:ea typeface="微軟正黑體" panose="020B0604030504040204" pitchFamily="34" charset="-120"/>
+                <a:cs typeface="+mn-cs"/>
+              </a:rPr>
+              <a:t>end-to-end pipeline</a:t>
+            </a:r>
+          </a:p>
+        </p:txBody>
+      </p:sp>
+      <p:pic>
+        <p:nvPicPr>
+          <p:cNvPr id="3" name="圖片 2">
+            <a:extLst>
+              <a:ext uri="{FF2B5EF4-FFF2-40B4-BE49-F238E27FC236}">
+                <a16:creationId xmlns:a16="http://schemas.microsoft.com/office/drawing/2014/main" id="{69BF7246-06C9-2E4E-D009-FC204940A5C0}"/>
+              </a:ext>
+            </a:extLst>
+          </p:cNvPr>
+          <p:cNvPicPr>
+            <a:picLocks noChangeAspect="1"/>
+          </p:cNvPicPr>
+          <p:nvPr/>
+        </p:nvPicPr>
+        <p:blipFill>
+          <a:blip r:embed="rId3"/>
+          <a:stretch>
+            <a:fillRect/>
+          </a:stretch>
+        </p:blipFill>
+        <p:spPr>
+          <a:xfrm>
+            <a:off x="342900" y="2057400"/>
+            <a:ext cx="8458200" cy="2914044"/>
+          </a:xfrm>
+          <a:prstGeom prst="rect">
+            <a:avLst/>
+          </a:prstGeom>
+        </p:spPr>
+      </p:pic>
+    </p:spTree>
+    <p:extLst>
+      <p:ext uri="{BB962C8B-B14F-4D97-AF65-F5344CB8AC3E}">
+        <p14:creationId xmlns:p14="http://schemas.microsoft.com/office/powerpoint/2010/main" val="1375407038"/>
+      </p:ext>
+    </p:extLst>
+  </p:cSld>
+  <p:clrMapOvr>
+    <a:masterClrMapping/>
+  </p:clrMapOvr>
+  <p:transition>
+    <p:fade/>
+  </p:transition>
+</p:sld>
+</file>
+
+<file path=ppt/slides/slide30.xml><?xml version="1.0" encoding="utf-8"?>
 <p:sld xmlns:a="http://schemas.openxmlformats.org/drawingml/2006/main" xmlns:r="http://schemas.openxmlformats.org/officeDocument/2006/relationships" xmlns:p="http://schemas.openxmlformats.org/presentationml/2006/main">
   <p:cSld>
     <p:spTree>
@@ -16512,135 +17123,6 @@
     <p:extLst>
       <p:ext uri="{BB962C8B-B14F-4D97-AF65-F5344CB8AC3E}">
         <p14:creationId xmlns:p14="http://schemas.microsoft.com/office/powerpoint/2010/main" val="1852767385"/>
-      </p:ext>
-    </p:extLst>
-  </p:cSld>
-  <p:clrMapOvr>
-    <a:masterClrMapping/>
-  </p:clrMapOvr>
-  <p:transition>
-    <p:fade/>
-  </p:transition>
-</p:sld>
-</file>
-
-<file path=ppt/slides/slide3.xml><?xml version="1.0" encoding="utf-8"?>
-<p:sld xmlns:a="http://schemas.openxmlformats.org/drawingml/2006/main" xmlns:r="http://schemas.openxmlformats.org/officeDocument/2006/relationships" xmlns:p="http://schemas.openxmlformats.org/presentationml/2006/main">
-  <p:cSld>
-    <p:spTree>
-      <p:nvGrpSpPr>
-        <p:cNvPr id="1" name=""/>
-        <p:cNvGrpSpPr/>
-        <p:nvPr/>
-      </p:nvGrpSpPr>
-      <p:grpSpPr>
-        <a:xfrm>
-          <a:off x="0" y="0"/>
-          <a:ext cx="0" cy="0"/>
-          <a:chOff x="0" y="0"/>
-          <a:chExt cx="0" cy="0"/>
-        </a:xfrm>
-      </p:grpSpPr>
-      <p:sp>
-        <p:nvSpPr>
-          <p:cNvPr id="4" name="文字版面配置區 2"/>
-          <p:cNvSpPr txBox="1">
-            <a:spLocks/>
-          </p:cNvSpPr>
-          <p:nvPr/>
-        </p:nvSpPr>
-        <p:spPr>
-          <a:xfrm>
-            <a:off x="1295400" y="304800"/>
-            <a:ext cx="6477000" cy="990600"/>
-          </a:xfrm>
-          <a:prstGeom prst="rect">
-            <a:avLst/>
-          </a:prstGeom>
-        </p:spPr>
-        <p:txBody>
-          <a:bodyPr tIns="91440" bIns="91440" anchor="b" anchorCtr="0">
-            <a:noAutofit/>
-          </a:bodyPr>
-          <a:lstStyle/>
-          <a:p>
-            <a:pPr marL="0" marR="0" lvl="0" indent="0" algn="just" defTabSz="914400" rtl="0" eaLnBrk="1" fontAlgn="auto" latinLnBrk="0" hangingPunct="1">
-              <a:lnSpc>
-                <a:spcPct val="100000"/>
-              </a:lnSpc>
-              <a:spcBef>
-                <a:spcPct val="20000"/>
-              </a:spcBef>
-              <a:spcAft>
-                <a:spcPts val="0"/>
-              </a:spcAft>
-              <a:buClrTx/>
-              <a:buSzTx/>
-              <a:buFontTx/>
-              <a:buNone/>
-              <a:tabLst/>
-              <a:defRPr/>
-            </a:pPr>
-            <a:r>
-              <a:rPr kumimoji="0" lang="en-US" altLang="zh-TW" sz="4800" b="1" i="0" u="none" strike="noStrike" kern="0" cap="none" spc="0" normalizeH="0" baseline="0" noProof="0" dirty="0">
-                <a:ln>
-                  <a:noFill/>
-                </a:ln>
-                <a:solidFill>
-                  <a:srgbClr val="00B0F0"/>
-                </a:solidFill>
-                <a:effectLst>
-                  <a:outerShdw blurRad="38100" dist="38100" dir="2700000" algn="tl">
-                    <a:srgbClr val="000000">
-                      <a:alpha val="43137"/>
-                    </a:srgbClr>
-                  </a:outerShdw>
-                </a:effectLst>
-                <a:uLnTx/>
-                <a:uFillTx/>
-                <a:latin typeface="微軟正黑體" panose="020B0604030504040204" pitchFamily="34" charset="-120"/>
-                <a:ea typeface="微軟正黑體" panose="020B0604030504040204" pitchFamily="34" charset="-120"/>
-                <a:cs typeface="+mn-cs"/>
-              </a:rPr>
-              <a:t>end-to-end pipeline</a:t>
-            </a:r>
-          </a:p>
-        </p:txBody>
-      </p:sp>
-      <p:pic>
-        <p:nvPicPr>
-          <p:cNvPr id="3" name="圖片 2">
-            <a:extLst>
-              <a:ext uri="{FF2B5EF4-FFF2-40B4-BE49-F238E27FC236}">
-                <a16:creationId xmlns:a16="http://schemas.microsoft.com/office/drawing/2014/main" id="{69BF7246-06C9-2E4E-D009-FC204940A5C0}"/>
-              </a:ext>
-            </a:extLst>
-          </p:cNvPr>
-          <p:cNvPicPr>
-            <a:picLocks noChangeAspect="1"/>
-          </p:cNvPicPr>
-          <p:nvPr/>
-        </p:nvPicPr>
-        <p:blipFill>
-          <a:blip r:embed="rId3"/>
-          <a:stretch>
-            <a:fillRect/>
-          </a:stretch>
-        </p:blipFill>
-        <p:spPr>
-          <a:xfrm>
-            <a:off x="342900" y="2057400"/>
-            <a:ext cx="8458200" cy="2914044"/>
-          </a:xfrm>
-          <a:prstGeom prst="rect">
-            <a:avLst/>
-          </a:prstGeom>
-        </p:spPr>
-      </p:pic>
-    </p:spTree>
-    <p:extLst>
-      <p:ext uri="{BB962C8B-B14F-4D97-AF65-F5344CB8AC3E}">
-        <p14:creationId xmlns:p14="http://schemas.microsoft.com/office/powerpoint/2010/main" val="1375407038"/>
       </p:ext>
     </p:extLst>
   </p:cSld>
@@ -17305,8 +17787,8 @@
         </p:nvSpPr>
         <p:spPr>
           <a:xfrm>
-            <a:off x="1295400" y="304800"/>
-            <a:ext cx="6477000" cy="990600"/>
+            <a:off x="3063910" y="314849"/>
+            <a:ext cx="3447422" cy="990600"/>
           </a:xfrm>
           <a:prstGeom prst="rect">
             <a:avLst/>
